--- a/output/wordlabs-vert-3day.pptx
+++ b/output/wordlabs-vert-3day.pptx
@@ -6071,7 +6071,7 @@
                 <a:ea typeface="Calibri" pitchFamily="34" charset="-122"/>
                 <a:cs typeface="Calibri" pitchFamily="34" charset="-120"/>
               </a:rPr>
-              <a:t> this old shed into a reading nook, or will the noise </a:t>
+              <a:t> this fraction into a decimal, or will you </a:t>
             </a:r>
             <a:pPr algn="l" indent="0" marL="0">
               <a:buNone/>
@@ -6088,7 +6088,7 @@
                 <a:ea typeface="Calibri" pitchFamily="34" charset="-122"/>
                 <a:cs typeface="Calibri" pitchFamily="34" charset="-120"/>
               </a:rPr>
-              <a:t>divert</a:t>
+              <a:t>invert</a:t>
             </a:r>
             <a:pPr algn="l" indent="0" marL="0">
               <a:buNone/>
@@ -6102,7 +6102,7 @@
                 <a:ea typeface="Calibri" pitchFamily="34" charset="-122"/>
                 <a:cs typeface="Calibri" pitchFamily="34" charset="-120"/>
               </a:rPr>
-              <a:t> your attention?</a:t>
+              <a:t> the numbers instead?</a:t>
             </a:r>
             <a:endParaRPr lang="en-US" sz="1800" dirty="0"/>
           </a:p>
@@ -6385,7 +6385,7 @@
                 <a:ea typeface="Trebuchet MS" pitchFamily="34" charset="-122"/>
                 <a:cs typeface="Trebuchet MS" pitchFamily="34" charset="-120"/>
               </a:rPr>
-              <a:t>divert</a:t>
+              <a:t>invert</a:t>
             </a:r>
             <a:endParaRPr lang="en-US" sz="1400" dirty="0"/>
           </a:p>
@@ -7860,7 +7860,7 @@
                 <a:ea typeface="Calibri" pitchFamily="34" charset="-122"/>
                 <a:cs typeface="Calibri" pitchFamily="34" charset="-120"/>
               </a:rPr>
-              <a:t>together, completely</a:t>
+              <a:t>together, with</a:t>
             </a:r>
             <a:endParaRPr lang="en-US" sz="850" dirty="0"/>
           </a:p>
@@ -7899,7 +7899,7 @@
                 <a:ea typeface="Calibri" pitchFamily="34" charset="-122"/>
                 <a:cs typeface="Calibri" pitchFamily="34" charset="-120"/>
               </a:rPr>
-              <a:t>con + vert → the prefix stays unchanged before 'v'</a:t>
+              <a:t>con + vert: prefix joins smoothly before 'v'</a:t>
             </a:r>
             <a:endParaRPr lang="en-US" sz="700" dirty="0"/>
           </a:p>
@@ -8884,7 +8884,7 @@
                 <a:ea typeface="Calibri" pitchFamily="34" charset="-122"/>
                 <a:cs typeface="Calibri" pitchFamily="34" charset="-120"/>
               </a:rPr>
-              <a:t>together, completely</a:t>
+              <a:t>together, with</a:t>
             </a:r>
             <a:endParaRPr lang="en-US" sz="850" dirty="0"/>
           </a:p>
@@ -8923,7 +8923,7 @@
                 <a:ea typeface="Calibri" pitchFamily="34" charset="-122"/>
                 <a:cs typeface="Calibri" pitchFamily="34" charset="-120"/>
               </a:rPr>
-              <a:t>con + vert → the prefix stays unchanged before 'v'</a:t>
+              <a:t>con + vert: prefix joins smoothly before 'v'</a:t>
             </a:r>
             <a:endParaRPr lang="en-US" sz="700" dirty="0"/>
           </a:p>
@@ -10040,7 +10040,7 @@
                 <a:ea typeface="Calibri" pitchFamily="34" charset="-122"/>
                 <a:cs typeface="Calibri" pitchFamily="34" charset="-120"/>
               </a:rPr>
-              <a:t>together, completely</a:t>
+              <a:t>together, with</a:t>
             </a:r>
             <a:endParaRPr lang="en-US" sz="850" dirty="0"/>
           </a:p>
@@ -10079,7 +10079,7 @@
                 <a:ea typeface="Calibri" pitchFamily="34" charset="-122"/>
                 <a:cs typeface="Calibri" pitchFamily="34" charset="-120"/>
               </a:rPr>
-              <a:t>con + vert → the prefix stays unchanged before 'v'</a:t>
+              <a:t>con + vert: prefix joins smoothly before 'v'</a:t>
             </a:r>
             <a:endParaRPr lang="en-US" sz="700" dirty="0"/>
           </a:p>
@@ -11414,7 +11414,7 @@
                 <a:ea typeface="Trebuchet MS" pitchFamily="34" charset="-122"/>
                 <a:cs typeface="Trebuchet MS" pitchFamily="34" charset="-120"/>
               </a:rPr>
-              <a:t>divert</a:t>
+              <a:t>invert</a:t>
             </a:r>
             <a:endParaRPr lang="en-US" sz="2800" dirty="0"/>
           </a:p>
@@ -12241,7 +12241,7 @@
                 <a:ea typeface="Trebuchet MS" pitchFamily="34" charset="-122"/>
                 <a:cs typeface="Trebuchet MS" pitchFamily="34" charset="-120"/>
               </a:rPr>
-              <a:t>divert</a:t>
+              <a:t>invert</a:t>
             </a:r>
             <a:endParaRPr lang="en-US" sz="2800" dirty="0"/>
           </a:p>
@@ -12380,7 +12380,7 @@
                 <a:ea typeface="Trebuchet MS" pitchFamily="34" charset="-122"/>
                 <a:cs typeface="Trebuchet MS" pitchFamily="34" charset="-120"/>
               </a:rPr>
-              <a:t>di</a:t>
+              <a:t>in</a:t>
             </a:r>
             <a:endParaRPr lang="en-US" sz="1300" dirty="0"/>
           </a:p>
@@ -12419,7 +12419,7 @@
                 <a:ea typeface="Calibri" pitchFamily="34" charset="-122"/>
                 <a:cs typeface="Calibri" pitchFamily="34" charset="-120"/>
               </a:rPr>
-              <a:t>apart, away</a:t>
+              <a:t>into, upon</a:t>
             </a:r>
             <a:endParaRPr lang="en-US" sz="850" dirty="0"/>
           </a:p>
@@ -13226,7 +13226,7 @@
                 <a:ea typeface="Trebuchet MS" pitchFamily="34" charset="-122"/>
                 <a:cs typeface="Trebuchet MS" pitchFamily="34" charset="-120"/>
               </a:rPr>
-              <a:t>divert</a:t>
+              <a:t>invert</a:t>
             </a:r>
             <a:endParaRPr lang="en-US" sz="2800" dirty="0"/>
           </a:p>
@@ -13365,7 +13365,7 @@
                 <a:ea typeface="Trebuchet MS" pitchFamily="34" charset="-122"/>
                 <a:cs typeface="Trebuchet MS" pitchFamily="34" charset="-120"/>
               </a:rPr>
-              <a:t>di</a:t>
+              <a:t>in</a:t>
             </a:r>
             <a:endParaRPr lang="en-US" sz="1300" dirty="0"/>
           </a:p>
@@ -13404,7 +13404,7 @@
                 <a:ea typeface="Calibri" pitchFamily="34" charset="-122"/>
                 <a:cs typeface="Calibri" pitchFamily="34" charset="-120"/>
               </a:rPr>
-              <a:t>apart, away</a:t>
+              <a:t>into, upon</a:t>
             </a:r>
             <a:endParaRPr lang="en-US" sz="850" dirty="0"/>
           </a:p>
@@ -13675,7 +13675,7 @@
                 <a:ea typeface="Trebuchet MS" pitchFamily="34" charset="-122"/>
                 <a:cs typeface="Trebuchet MS" pitchFamily="34" charset="-120"/>
               </a:rPr>
-              <a:t>di</a:t>
+              <a:t>in</a:t>
             </a:r>
             <a:endParaRPr lang="en-US" sz="1400" dirty="0"/>
           </a:p>
@@ -14608,7 +14608,7 @@
                 <a:ea typeface="Trebuchet MS" pitchFamily="34" charset="-122"/>
                 <a:cs typeface="Trebuchet MS" pitchFamily="34" charset="-120"/>
               </a:rPr>
-              <a:t>divert</a:t>
+              <a:t>invert</a:t>
             </a:r>
             <a:endParaRPr lang="en-US" sz="2800" dirty="0"/>
           </a:p>
@@ -14747,7 +14747,7 @@
                 <a:ea typeface="Trebuchet MS" pitchFamily="34" charset="-122"/>
                 <a:cs typeface="Trebuchet MS" pitchFamily="34" charset="-120"/>
               </a:rPr>
-              <a:t>di</a:t>
+              <a:t>in</a:t>
             </a:r>
             <a:endParaRPr lang="en-US" sz="1300" dirty="0"/>
           </a:p>
@@ -14786,7 +14786,7 @@
                 <a:ea typeface="Calibri" pitchFamily="34" charset="-122"/>
                 <a:cs typeface="Calibri" pitchFamily="34" charset="-120"/>
               </a:rPr>
-              <a:t>apart, away</a:t>
+              <a:t>into, upon</a:t>
             </a:r>
             <a:endParaRPr lang="en-US" sz="850" dirty="0"/>
           </a:p>
@@ -15057,7 +15057,7 @@
                 <a:ea typeface="Trebuchet MS" pitchFamily="34" charset="-122"/>
                 <a:cs typeface="Trebuchet MS" pitchFamily="34" charset="-120"/>
               </a:rPr>
-              <a:t>di</a:t>
+              <a:t>in</a:t>
             </a:r>
             <a:endParaRPr lang="en-US" sz="1400" dirty="0"/>
           </a:p>
@@ -15321,7 +15321,7 @@
                 <a:ea typeface="Trebuchet MS" pitchFamily="34" charset="-122"/>
                 <a:cs typeface="Trebuchet MS" pitchFamily="34" charset="-120"/>
               </a:rPr>
-              <a:t>d</a:t>
+              <a:t>i</a:t>
             </a:r>
             <a:endParaRPr lang="en-US" sz="900" dirty="0"/>
           </a:p>
@@ -15387,7 +15387,7 @@
                 <a:ea typeface="Trebuchet MS" pitchFamily="34" charset="-122"/>
                 <a:cs typeface="Trebuchet MS" pitchFamily="34" charset="-120"/>
               </a:rPr>
-              <a:t>i</a:t>
+              <a:t>n</a:t>
             </a:r>
             <a:endParaRPr lang="en-US" sz="900" dirty="0"/>
           </a:p>
@@ -16493,7 +16493,7 @@
                 <a:ea typeface="Trebuchet MS" pitchFamily="34" charset="-122"/>
                 <a:cs typeface="Trebuchet MS" pitchFamily="34" charset="-120"/>
               </a:rPr>
-              <a:t>2</a:t>
+              <a:t>3</a:t>
             </a:r>
             <a:pPr algn="ctr" indent="0" marL="0">
               <a:buNone/>
@@ -16911,7 +16911,7 @@
                 <a:ea typeface="Calibri" pitchFamily="34" charset="-122"/>
                 <a:cs typeface="Calibri" pitchFamily="34" charset="-120"/>
               </a:rPr>
-              <a:t>After the </a:t>
+              <a:t>The magician could </a:t>
             </a:r>
             <a:pPr algn="l" indent="0" marL="0">
               <a:buNone/>
@@ -16928,7 +16928,7 @@
                 <a:ea typeface="Calibri" pitchFamily="34" charset="-122"/>
                 <a:cs typeface="Calibri" pitchFamily="34" charset="-120"/>
               </a:rPr>
-              <a:t>inversion</a:t>
+              <a:t>divert</a:t>
             </a:r>
             <a:pPr algn="l" indent="0" marL="0">
               <a:buNone/>
@@ -16942,7 +16942,7 @@
                 <a:ea typeface="Calibri" pitchFamily="34" charset="-122"/>
                 <a:cs typeface="Calibri" pitchFamily="34" charset="-120"/>
               </a:rPr>
-              <a:t> of the map, we could </a:t>
+              <a:t> the audience's attention, </a:t>
             </a:r>
             <a:pPr algn="l" indent="0" marL="0">
               <a:buNone/>
@@ -16959,7 +16959,7 @@
                 <a:ea typeface="Calibri" pitchFamily="34" charset="-122"/>
                 <a:cs typeface="Calibri" pitchFamily="34" charset="-120"/>
               </a:rPr>
-              <a:t>divert</a:t>
+              <a:t>subvert</a:t>
             </a:r>
             <a:pPr algn="l" indent="0" marL="0">
               <a:buNone/>
@@ -16973,7 +16973,7 @@
                 <a:ea typeface="Calibri" pitchFamily="34" charset="-122"/>
                 <a:cs typeface="Calibri" pitchFamily="34" charset="-120"/>
               </a:rPr>
-              <a:t> our route and </a:t>
+              <a:t> their expectations, and </a:t>
             </a:r>
             <a:pPr algn="l" indent="0" marL="0">
               <a:buNone/>
@@ -16990,7 +16990,7 @@
                 <a:ea typeface="Calibri" pitchFamily="34" charset="-122"/>
                 <a:cs typeface="Calibri" pitchFamily="34" charset="-120"/>
               </a:rPr>
-              <a:t>convert</a:t>
+              <a:t>revert</a:t>
             </a:r>
             <a:pPr algn="l" indent="0" marL="0">
               <a:buNone/>
@@ -17004,7 +17004,7 @@
                 <a:ea typeface="Calibri" pitchFamily="34" charset="-122"/>
                 <a:cs typeface="Calibri" pitchFamily="34" charset="-120"/>
               </a:rPr>
-              <a:t> our plan to reach the campsite safely.</a:t>
+              <a:t> to his original trick!</a:t>
             </a:r>
             <a:endParaRPr lang="en-US" sz="1800" dirty="0"/>
           </a:p>
@@ -17159,7 +17159,7 @@
                 <a:ea typeface="Trebuchet MS" pitchFamily="34" charset="-122"/>
                 <a:cs typeface="Trebuchet MS" pitchFamily="34" charset="-120"/>
               </a:rPr>
-              <a:t>inversion</a:t>
+              <a:t>divert</a:t>
             </a:r>
             <a:endParaRPr lang="en-US" sz="1400" dirty="0"/>
           </a:p>
@@ -17287,7 +17287,7 @@
                 <a:ea typeface="Trebuchet MS" pitchFamily="34" charset="-122"/>
                 <a:cs typeface="Trebuchet MS" pitchFamily="34" charset="-120"/>
               </a:rPr>
-              <a:t>divert</a:t>
+              <a:t>subvert</a:t>
             </a:r>
             <a:endParaRPr lang="en-US" sz="1400" dirty="0"/>
           </a:p>
@@ -17415,7 +17415,7 @@
                 <a:ea typeface="Trebuchet MS" pitchFamily="34" charset="-122"/>
                 <a:cs typeface="Trebuchet MS" pitchFamily="34" charset="-120"/>
               </a:rPr>
-              <a:t>convert</a:t>
+              <a:t>revert</a:t>
             </a:r>
             <a:endParaRPr lang="en-US" sz="1400" dirty="0"/>
           </a:p>
@@ -17885,7 +17885,7 @@
                 <a:ea typeface="Trebuchet MS" pitchFamily="34" charset="-122"/>
                 <a:cs typeface="Trebuchet MS" pitchFamily="34" charset="-120"/>
               </a:rPr>
-              <a:t>inversion</a:t>
+              <a:t>divert</a:t>
             </a:r>
             <a:endParaRPr lang="en-US" sz="2800" dirty="0"/>
           </a:p>
@@ -18712,7 +18712,7 @@
                 <a:ea typeface="Trebuchet MS" pitchFamily="34" charset="-122"/>
                 <a:cs typeface="Trebuchet MS" pitchFamily="34" charset="-120"/>
               </a:rPr>
-              <a:t>inversion</a:t>
+              <a:t>divert</a:t>
             </a:r>
             <a:endParaRPr lang="en-US" sz="2800" dirty="0"/>
           </a:p>
@@ -18792,7 +18792,7 @@
         </p:nvSpPr>
         <p:spPr>
           <a:xfrm>
-            <a:off x="2221992" y="2258568"/>
+            <a:off x="2938272" y="2258568"/>
             <a:ext cx="1828800" cy="292608"/>
           </a:xfrm>
           <a:prstGeom prst="rect">
@@ -18826,7 +18826,7 @@
         </p:nvSpPr>
         <p:spPr>
           <a:xfrm>
-            <a:off x="2221992" y="2258568"/>
+            <a:off x="2938272" y="2258568"/>
             <a:ext cx="1828800" cy="292608"/>
           </a:xfrm>
           <a:prstGeom prst="rect">
@@ -18851,7 +18851,7 @@
                 <a:ea typeface="Trebuchet MS" pitchFamily="34" charset="-122"/>
                 <a:cs typeface="Trebuchet MS" pitchFamily="34" charset="-120"/>
               </a:rPr>
-              <a:t>in</a:t>
+              <a:t>di</a:t>
             </a:r>
             <a:endParaRPr lang="en-US" sz="1300" dirty="0"/>
           </a:p>
@@ -18865,7 +18865,7 @@
         </p:nvSpPr>
         <p:spPr>
           <a:xfrm>
-            <a:off x="2221992" y="2569464"/>
+            <a:off x="2938272" y="2569464"/>
             <a:ext cx="1828800" cy="201168"/>
           </a:xfrm>
           <a:prstGeom prst="rect">
@@ -18890,7 +18890,7 @@
                 <a:ea typeface="Calibri" pitchFamily="34" charset="-122"/>
                 <a:cs typeface="Calibri" pitchFamily="34" charset="-120"/>
               </a:rPr>
-              <a:t>into, upon</a:t>
+              <a:t>away, apart</a:t>
             </a:r>
             <a:endParaRPr lang="en-US" sz="850" dirty="0"/>
           </a:p>
@@ -18904,7 +18904,7 @@
         </p:nvSpPr>
         <p:spPr>
           <a:xfrm>
-            <a:off x="4370832" y="2258568"/>
+            <a:off x="5803392" y="2258568"/>
             <a:ext cx="1828800" cy="292608"/>
           </a:xfrm>
           <a:prstGeom prst="rect">
@@ -18913,11 +18913,11 @@
             </a:avLst>
           </a:prstGeom>
           <a:solidFill>
-            <a:srgbClr val="FCE7F3"/>
+            <a:srgbClr val="CCFBF1"/>
           </a:solidFill>
           <a:ln w="19050">
             <a:solidFill>
-              <a:srgbClr val="DB2777"/>
+              <a:srgbClr val="0D9488"/>
             </a:solidFill>
             <a:prstDash val="solid"/>
           </a:ln>
@@ -18938,7 +18938,7 @@
         </p:nvSpPr>
         <p:spPr>
           <a:xfrm>
-            <a:off x="4370832" y="2258568"/>
+            <a:off x="5803392" y="2258568"/>
             <a:ext cx="1828800" cy="292608"/>
           </a:xfrm>
           <a:prstGeom prst="rect">
@@ -18957,13 +18957,13 @@
             <a:r>
               <a:rPr lang="en-US" sz="1300" b="1" dirty="0">
                 <a:solidFill>
-                  <a:srgbClr val="9D174D"/>
+                  <a:srgbClr val="0F766E"/>
                 </a:solidFill>
                 <a:latin typeface="Trebuchet MS" pitchFamily="34" charset="0"/>
                 <a:ea typeface="Trebuchet MS" pitchFamily="34" charset="-122"/>
                 <a:cs typeface="Trebuchet MS" pitchFamily="34" charset="-120"/>
               </a:rPr>
-              <a:t>vers</a:t>
+              <a:t>vert</a:t>
             </a:r>
             <a:endParaRPr lang="en-US" sz="1300" dirty="0"/>
           </a:p>
@@ -18977,7 +18977,7 @@
         </p:nvSpPr>
         <p:spPr>
           <a:xfrm>
-            <a:off x="4370832" y="2569464"/>
+            <a:off x="5803392" y="2569464"/>
             <a:ext cx="1828800" cy="201168"/>
           </a:xfrm>
           <a:prstGeom prst="rect">
@@ -19010,87 +19010,173 @@
       </p:sp>
       <p:sp>
         <p:nvSpPr>
-          <p:cNvPr id="22" name="Text 20"/>
-          <p:cNvSpPr/>
-          <p:nvPr/>
-        </p:nvSpPr>
-        <p:spPr>
-          <a:xfrm>
-            <a:off x="4370832" y="2752344"/>
-            <a:ext cx="1828800" cy="182880"/>
-          </a:xfrm>
-          <a:prstGeom prst="rect">
-            <a:avLst/>
-          </a:prstGeom>
-          <a:noFill/>
-          <a:ln/>
-        </p:spPr>
-        <p:txBody>
-          <a:bodyPr wrap="square" lIns="0" tIns="0" rIns="0" bIns="0" rtlCol="0" anchor="t"/>
-          <a:lstStyle/>
-          <a:p>
-            <a:pPr algn="ctr" indent="0" marL="0">
-              <a:buNone/>
-            </a:pPr>
-            <a:r>
-              <a:rPr lang="en-US" sz="700" i="1" dirty="0">
-                <a:solidFill>
-                  <a:srgbClr val="94A3B8"/>
+          <p:cNvPr id="22" name="Shape 20"/>
+          <p:cNvSpPr/>
+          <p:nvPr/>
+        </p:nvSpPr>
+        <p:spPr>
+          <a:xfrm>
+            <a:off x="365760" y="3273552"/>
+            <a:ext cx="1371600" cy="658368"/>
+          </a:xfrm>
+          <a:prstGeom prst="rect">
+            <a:avLst>
+              <a:gd name="adj" fmla="val 8333"/>
+            </a:avLst>
+          </a:prstGeom>
+          <a:solidFill>
+            <a:srgbClr val="E2E8F0"/>
+          </a:solidFill>
+          <a:ln w="12700">
+            <a:solidFill>
+              <a:srgbClr val="E2E8F0"/>
+            </a:solidFill>
+            <a:prstDash val="solid"/>
+          </a:ln>
+        </p:spPr>
+      </p:sp>
+      <p:sp>
+        <p:nvSpPr>
+          <p:cNvPr id="23" name="Text 21"/>
+          <p:cNvSpPr/>
+          <p:nvPr/>
+        </p:nvSpPr>
+        <p:spPr>
+          <a:xfrm>
+            <a:off x="365760" y="3273552"/>
+            <a:ext cx="1371600" cy="658368"/>
+          </a:xfrm>
+          <a:prstGeom prst="rect">
+            <a:avLst/>
+          </a:prstGeom>
+          <a:noFill/>
+          <a:ln/>
+        </p:spPr>
+        <p:txBody>
+          <a:bodyPr wrap="square" lIns="0" tIns="0" rIns="0" bIns="0" rtlCol="0" anchor="ctr"/>
+          <a:lstStyle/>
+          <a:p>
+            <a:pPr algn="ctr" indent="0" marL="0">
+              <a:buNone/>
+            </a:pPr>
+            <a:r>
+              <a:rPr lang="en-US" sz="1100" b="1" dirty="0">
+                <a:solidFill>
+                  <a:srgbClr val="475569"/>
+                </a:solidFill>
+                <a:latin typeface="Trebuchet MS" pitchFamily="34" charset="0"/>
+                <a:ea typeface="Trebuchet MS" pitchFamily="34" charset="-122"/>
+                <a:cs typeface="Trebuchet MS" pitchFamily="34" charset="-120"/>
+              </a:rPr>
+              <a:t>Syllables</a:t>
+            </a:r>
+            <a:endParaRPr lang="en-US" sz="1100" dirty="0"/>
+          </a:p>
+        </p:txBody>
+      </p:sp>
+      <p:sp>
+        <p:nvSpPr>
+          <p:cNvPr id="24" name="Shape 22"/>
+          <p:cNvSpPr/>
+          <p:nvPr/>
+        </p:nvSpPr>
+        <p:spPr>
+          <a:xfrm>
+            <a:off x="1874520" y="3273552"/>
+            <a:ext cx="6903720" cy="658368"/>
+          </a:xfrm>
+          <a:prstGeom prst="rect">
+            <a:avLst>
+              <a:gd name="adj" fmla="val 8333"/>
+            </a:avLst>
+          </a:prstGeom>
+          <a:solidFill>
+            <a:srgbClr val="F8FAFC"/>
+          </a:solidFill>
+          <a:ln w="12700">
+            <a:solidFill>
+              <a:srgbClr val="E2E8F0"/>
+            </a:solidFill>
+            <a:prstDash val="dash"/>
+          </a:ln>
+        </p:spPr>
+      </p:sp>
+      <p:sp>
+        <p:nvSpPr>
+          <p:cNvPr id="25" name="Text 23"/>
+          <p:cNvSpPr/>
+          <p:nvPr/>
+        </p:nvSpPr>
+        <p:spPr>
+          <a:xfrm>
+            <a:off x="1874520" y="3273552"/>
+            <a:ext cx="6903720" cy="658368"/>
+          </a:xfrm>
+          <a:prstGeom prst="rect">
+            <a:avLst/>
+          </a:prstGeom>
+          <a:noFill/>
+          <a:ln/>
+        </p:spPr>
+        <p:txBody>
+          <a:bodyPr wrap="square" rtlCol="0" anchor="ctr"/>
+          <a:lstStyle/>
+          <a:p>
+            <a:pPr algn="ctr" indent="0" marL="0">
+              <a:buNone/>
+            </a:pPr>
+            <a:r>
+              <a:rPr lang="en-US" sz="1100" i="1" dirty="0">
+                <a:solidFill>
+                  <a:srgbClr val="CBD5E1"/>
                 </a:solidFill>
                 <a:latin typeface="Calibri" pitchFamily="34" charset="0"/>
                 <a:ea typeface="Calibri" pitchFamily="34" charset="-122"/>
                 <a:cs typeface="Calibri" pitchFamily="34" charset="-120"/>
               </a:rPr>
-              <a:t>vert → vers before the suffix '-ion'</a:t>
-            </a:r>
-            <a:endParaRPr lang="en-US" sz="700" dirty="0"/>
-          </a:p>
-        </p:txBody>
-      </p:sp>
-      <p:sp>
-        <p:nvSpPr>
-          <p:cNvPr id="23" name="Shape 21"/>
-          <p:cNvSpPr/>
-          <p:nvPr/>
-        </p:nvSpPr>
-        <p:spPr>
-          <a:xfrm>
-            <a:off x="6519672" y="2258568"/>
-            <a:ext cx="1828800" cy="292608"/>
+              <a:t>Write here...</a:t>
+            </a:r>
+            <a:endParaRPr lang="en-US" sz="1100" dirty="0"/>
+          </a:p>
+        </p:txBody>
+      </p:sp>
+      <p:sp>
+        <p:nvSpPr>
+          <p:cNvPr id="26" name="Shape 24"/>
+          <p:cNvSpPr/>
+          <p:nvPr/>
+        </p:nvSpPr>
+        <p:spPr>
+          <a:xfrm>
+            <a:off x="365760" y="4096512"/>
+            <a:ext cx="1371600" cy="804672"/>
           </a:xfrm>
           <a:prstGeom prst="rect">
             <a:avLst>
-              <a:gd name="adj" fmla="val 25000"/>
+              <a:gd name="adj" fmla="val 6818"/>
             </a:avLst>
           </a:prstGeom>
           <a:solidFill>
-            <a:srgbClr val="FCE7F3"/>
-          </a:solidFill>
-          <a:ln w="19050">
-            <a:solidFill>
-              <a:srgbClr val="DB2777"/>
-            </a:solidFill>
-            <a:prstDash val="solid"/>
-          </a:ln>
-          <a:effectLst>
-            <a:outerShdw sx="100000" sy="100000" kx="0" ky="0" algn="bl" rotWithShape="0" blurRad="101600" dist="38100" dir="8100000">
-              <a:srgbClr val="000000">
-                <a:alpha val="12000"/>
-              </a:srgbClr>
-            </a:outerShdw>
-          </a:effectLst>
-        </p:spPr>
-      </p:sp>
-      <p:sp>
-        <p:nvSpPr>
-          <p:cNvPr id="24" name="Text 22"/>
-          <p:cNvSpPr/>
-          <p:nvPr/>
-        </p:nvSpPr>
-        <p:spPr>
-          <a:xfrm>
-            <a:off x="6519672" y="2258568"/>
-            <a:ext cx="1828800" cy="292608"/>
+            <a:srgbClr val="E2E8F0"/>
+          </a:solidFill>
+          <a:ln w="12700">
+            <a:solidFill>
+              <a:srgbClr val="E2E8F0"/>
+            </a:solidFill>
+            <a:prstDash val="solid"/>
+          </a:ln>
+        </p:spPr>
+      </p:sp>
+      <p:sp>
+        <p:nvSpPr>
+          <p:cNvPr id="27" name="Text 25"/>
+          <p:cNvSpPr/>
+          <p:nvPr/>
+        </p:nvSpPr>
+        <p:spPr>
+          <a:xfrm>
+            <a:off x="365760" y="4096512"/>
+            <a:ext cx="1371600" cy="804672"/>
           </a:xfrm>
           <a:prstGeom prst="rect">
             <a:avLst/>
@@ -19106,120 +19192,15 @@
               <a:buNone/>
             </a:pPr>
             <a:r>
-              <a:rPr lang="en-US" sz="1300" b="1" dirty="0">
-                <a:solidFill>
-                  <a:srgbClr val="9D174D"/>
+              <a:rPr lang="en-US" sz="1100" b="1" dirty="0">
+                <a:solidFill>
+                  <a:srgbClr val="475569"/>
                 </a:solidFill>
                 <a:latin typeface="Trebuchet MS" pitchFamily="34" charset="0"/>
                 <a:ea typeface="Trebuchet MS" pitchFamily="34" charset="-122"/>
                 <a:cs typeface="Trebuchet MS" pitchFamily="34" charset="-120"/>
               </a:rPr>
-              <a:t>ion</a:t>
-            </a:r>
-            <a:endParaRPr lang="en-US" sz="1300" dirty="0"/>
-          </a:p>
-        </p:txBody>
-      </p:sp>
-      <p:sp>
-        <p:nvSpPr>
-          <p:cNvPr id="25" name="Text 23"/>
-          <p:cNvSpPr/>
-          <p:nvPr/>
-        </p:nvSpPr>
-        <p:spPr>
-          <a:xfrm>
-            <a:off x="6519672" y="2569464"/>
-            <a:ext cx="1828800" cy="201168"/>
-          </a:xfrm>
-          <a:prstGeom prst="rect">
-            <a:avLst/>
-          </a:prstGeom>
-          <a:noFill/>
-          <a:ln/>
-        </p:spPr>
-        <p:txBody>
-          <a:bodyPr wrap="square" lIns="0" tIns="0" rIns="0" bIns="0" rtlCol="0" anchor="t"/>
-          <a:lstStyle/>
-          <a:p>
-            <a:pPr algn="ctr" indent="0" marL="0">
-              <a:buNone/>
-            </a:pPr>
-            <a:r>
-              <a:rPr lang="en-US" sz="850" dirty="0">
-                <a:solidFill>
-                  <a:srgbClr val="475569"/>
-                </a:solidFill>
-                <a:latin typeface="Calibri" pitchFamily="34" charset="0"/>
-                <a:ea typeface="Calibri" pitchFamily="34" charset="-122"/>
-                <a:cs typeface="Calibri" pitchFamily="34" charset="-120"/>
-              </a:rPr>
-              <a:t>act or result of</a:t>
-            </a:r>
-            <a:endParaRPr lang="en-US" sz="850" dirty="0"/>
-          </a:p>
-        </p:txBody>
-      </p:sp>
-      <p:sp>
-        <p:nvSpPr>
-          <p:cNvPr id="26" name="Shape 24"/>
-          <p:cNvSpPr/>
-          <p:nvPr/>
-        </p:nvSpPr>
-        <p:spPr>
-          <a:xfrm>
-            <a:off x="365760" y="3273552"/>
-            <a:ext cx="1371600" cy="658368"/>
-          </a:xfrm>
-          <a:prstGeom prst="rect">
-            <a:avLst>
-              <a:gd name="adj" fmla="val 8333"/>
-            </a:avLst>
-          </a:prstGeom>
-          <a:solidFill>
-            <a:srgbClr val="E2E8F0"/>
-          </a:solidFill>
-          <a:ln w="12700">
-            <a:solidFill>
-              <a:srgbClr val="E2E8F0"/>
-            </a:solidFill>
-            <a:prstDash val="solid"/>
-          </a:ln>
-        </p:spPr>
-      </p:sp>
-      <p:sp>
-        <p:nvSpPr>
-          <p:cNvPr id="27" name="Text 25"/>
-          <p:cNvSpPr/>
-          <p:nvPr/>
-        </p:nvSpPr>
-        <p:spPr>
-          <a:xfrm>
-            <a:off x="365760" y="3273552"/>
-            <a:ext cx="1371600" cy="658368"/>
-          </a:xfrm>
-          <a:prstGeom prst="rect">
-            <a:avLst/>
-          </a:prstGeom>
-          <a:noFill/>
-          <a:ln/>
-        </p:spPr>
-        <p:txBody>
-          <a:bodyPr wrap="square" lIns="0" tIns="0" rIns="0" bIns="0" rtlCol="0" anchor="ctr"/>
-          <a:lstStyle/>
-          <a:p>
-            <a:pPr algn="ctr" indent="0" marL="0">
-              <a:buNone/>
-            </a:pPr>
-            <a:r>
-              <a:rPr lang="en-US" sz="1100" b="1" dirty="0">
-                <a:solidFill>
-                  <a:srgbClr val="475569"/>
-                </a:solidFill>
-                <a:latin typeface="Trebuchet MS" pitchFamily="34" charset="0"/>
-                <a:ea typeface="Trebuchet MS" pitchFamily="34" charset="-122"/>
-                <a:cs typeface="Trebuchet MS" pitchFamily="34" charset="-120"/>
-              </a:rPr>
-              <a:t>Syllables</a:t>
+              <a:t>Phonemes</a:t>
             </a:r>
             <a:endParaRPr lang="en-US" sz="1100" dirty="0"/>
           </a:p>
@@ -19233,74 +19214,8 @@
         </p:nvSpPr>
         <p:spPr>
           <a:xfrm>
-            <a:off x="1874520" y="3273552"/>
-            <a:ext cx="6903720" cy="658368"/>
-          </a:xfrm>
-          <a:prstGeom prst="rect">
-            <a:avLst>
-              <a:gd name="adj" fmla="val 8333"/>
-            </a:avLst>
-          </a:prstGeom>
-          <a:solidFill>
-            <a:srgbClr val="F8FAFC"/>
-          </a:solidFill>
-          <a:ln w="12700">
-            <a:solidFill>
-              <a:srgbClr val="E2E8F0"/>
-            </a:solidFill>
-            <a:prstDash val="dash"/>
-          </a:ln>
-        </p:spPr>
-      </p:sp>
-      <p:sp>
-        <p:nvSpPr>
-          <p:cNvPr id="29" name="Text 27"/>
-          <p:cNvSpPr/>
-          <p:nvPr/>
-        </p:nvSpPr>
-        <p:spPr>
-          <a:xfrm>
-            <a:off x="1874520" y="3273552"/>
-            <a:ext cx="6903720" cy="658368"/>
-          </a:xfrm>
-          <a:prstGeom prst="rect">
-            <a:avLst/>
-          </a:prstGeom>
-          <a:noFill/>
-          <a:ln/>
-        </p:spPr>
-        <p:txBody>
-          <a:bodyPr wrap="square" rtlCol="0" anchor="ctr"/>
-          <a:lstStyle/>
-          <a:p>
-            <a:pPr algn="ctr" indent="0" marL="0">
-              <a:buNone/>
-            </a:pPr>
-            <a:r>
-              <a:rPr lang="en-US" sz="1100" i="1" dirty="0">
-                <a:solidFill>
-                  <a:srgbClr val="CBD5E1"/>
-                </a:solidFill>
-                <a:latin typeface="Calibri" pitchFamily="34" charset="0"/>
-                <a:ea typeface="Calibri" pitchFamily="34" charset="-122"/>
-                <a:cs typeface="Calibri" pitchFamily="34" charset="-120"/>
-              </a:rPr>
-              <a:t>Write here...</a:t>
-            </a:r>
-            <a:endParaRPr lang="en-US" sz="1100" dirty="0"/>
-          </a:p>
-        </p:txBody>
-      </p:sp>
-      <p:sp>
-        <p:nvSpPr>
-          <p:cNvPr id="30" name="Shape 28"/>
-          <p:cNvSpPr/>
-          <p:nvPr/>
-        </p:nvSpPr>
-        <p:spPr>
-          <a:xfrm>
-            <a:off x="365760" y="4096512"/>
-            <a:ext cx="1371600" cy="804672"/>
+            <a:off x="1874520" y="4096512"/>
+            <a:ext cx="6903720" cy="804672"/>
           </a:xfrm>
           <a:prstGeom prst="rect">
             <a:avLst>
@@ -19308,85 +19223,19 @@
             </a:avLst>
           </a:prstGeom>
           <a:solidFill>
-            <a:srgbClr val="E2E8F0"/>
+            <a:srgbClr val="F8FAFC"/>
           </a:solidFill>
           <a:ln w="12700">
             <a:solidFill>
               <a:srgbClr val="E2E8F0"/>
             </a:solidFill>
-            <a:prstDash val="solid"/>
-          </a:ln>
-        </p:spPr>
-      </p:sp>
-      <p:sp>
-        <p:nvSpPr>
-          <p:cNvPr id="31" name="Text 29"/>
-          <p:cNvSpPr/>
-          <p:nvPr/>
-        </p:nvSpPr>
-        <p:spPr>
-          <a:xfrm>
-            <a:off x="365760" y="4096512"/>
-            <a:ext cx="1371600" cy="804672"/>
-          </a:xfrm>
-          <a:prstGeom prst="rect">
-            <a:avLst/>
-          </a:prstGeom>
-          <a:noFill/>
-          <a:ln/>
-        </p:spPr>
-        <p:txBody>
-          <a:bodyPr wrap="square" lIns="0" tIns="0" rIns="0" bIns="0" rtlCol="0" anchor="ctr"/>
-          <a:lstStyle/>
-          <a:p>
-            <a:pPr algn="ctr" indent="0" marL="0">
-              <a:buNone/>
-            </a:pPr>
-            <a:r>
-              <a:rPr lang="en-US" sz="1100" b="1" dirty="0">
-                <a:solidFill>
-                  <a:srgbClr val="475569"/>
-                </a:solidFill>
-                <a:latin typeface="Trebuchet MS" pitchFamily="34" charset="0"/>
-                <a:ea typeface="Trebuchet MS" pitchFamily="34" charset="-122"/>
-                <a:cs typeface="Trebuchet MS" pitchFamily="34" charset="-120"/>
-              </a:rPr>
-              <a:t>Phonemes</a:t>
-            </a:r>
-            <a:endParaRPr lang="en-US" sz="1100" dirty="0"/>
-          </a:p>
-        </p:txBody>
-      </p:sp>
-      <p:sp>
-        <p:nvSpPr>
-          <p:cNvPr id="32" name="Shape 30"/>
-          <p:cNvSpPr/>
-          <p:nvPr/>
-        </p:nvSpPr>
-        <p:spPr>
-          <a:xfrm>
-            <a:off x="1874520" y="4096512"/>
-            <a:ext cx="6903720" cy="804672"/>
-          </a:xfrm>
-          <a:prstGeom prst="rect">
-            <a:avLst>
-              <a:gd name="adj" fmla="val 6818"/>
-            </a:avLst>
-          </a:prstGeom>
-          <a:solidFill>
-            <a:srgbClr val="F8FAFC"/>
-          </a:solidFill>
-          <a:ln w="12700">
-            <a:solidFill>
-              <a:srgbClr val="E2E8F0"/>
-            </a:solidFill>
             <a:prstDash val="dash"/>
           </a:ln>
         </p:spPr>
       </p:sp>
       <p:sp>
         <p:nvSpPr>
-          <p:cNvPr id="33" name="Text 31"/>
+          <p:cNvPr id="29" name="Text 27"/>
           <p:cNvSpPr/>
           <p:nvPr/>
         </p:nvSpPr>
@@ -19848,7 +19697,7 @@
                 <a:ea typeface="Trebuchet MS" pitchFamily="34" charset="-122"/>
                 <a:cs typeface="Trebuchet MS" pitchFamily="34" charset="-120"/>
               </a:rPr>
-              <a:t>inversion</a:t>
+              <a:t>divert</a:t>
             </a:r>
             <a:endParaRPr lang="en-US" sz="2800" dirty="0"/>
           </a:p>
@@ -19928,7 +19777,7 @@
         </p:nvSpPr>
         <p:spPr>
           <a:xfrm>
-            <a:off x="2221992" y="2258568"/>
+            <a:off x="2938272" y="2258568"/>
             <a:ext cx="1828800" cy="292608"/>
           </a:xfrm>
           <a:prstGeom prst="rect">
@@ -19962,7 +19811,7 @@
         </p:nvSpPr>
         <p:spPr>
           <a:xfrm>
-            <a:off x="2221992" y="2258568"/>
+            <a:off x="2938272" y="2258568"/>
             <a:ext cx="1828800" cy="292608"/>
           </a:xfrm>
           <a:prstGeom prst="rect">
@@ -19987,7 +19836,7 @@
                 <a:ea typeface="Trebuchet MS" pitchFamily="34" charset="-122"/>
                 <a:cs typeface="Trebuchet MS" pitchFamily="34" charset="-120"/>
               </a:rPr>
-              <a:t>in</a:t>
+              <a:t>di</a:t>
             </a:r>
             <a:endParaRPr lang="en-US" sz="1300" dirty="0"/>
           </a:p>
@@ -20001,7 +19850,7 @@
         </p:nvSpPr>
         <p:spPr>
           <a:xfrm>
-            <a:off x="2221992" y="2569464"/>
+            <a:off x="2938272" y="2569464"/>
             <a:ext cx="1828800" cy="201168"/>
           </a:xfrm>
           <a:prstGeom prst="rect">
@@ -20026,7 +19875,7 @@
                 <a:ea typeface="Calibri" pitchFamily="34" charset="-122"/>
                 <a:cs typeface="Calibri" pitchFamily="34" charset="-120"/>
               </a:rPr>
-              <a:t>into, upon</a:t>
+              <a:t>away, apart</a:t>
             </a:r>
             <a:endParaRPr lang="en-US" sz="850" dirty="0"/>
           </a:p>
@@ -20040,7 +19889,7 @@
         </p:nvSpPr>
         <p:spPr>
           <a:xfrm>
-            <a:off x="4370832" y="2258568"/>
+            <a:off x="5803392" y="2258568"/>
             <a:ext cx="1828800" cy="292608"/>
           </a:xfrm>
           <a:prstGeom prst="rect">
@@ -20049,11 +19898,11 @@
             </a:avLst>
           </a:prstGeom>
           <a:solidFill>
-            <a:srgbClr val="FCE7F3"/>
+            <a:srgbClr val="CCFBF1"/>
           </a:solidFill>
           <a:ln w="19050">
             <a:solidFill>
-              <a:srgbClr val="DB2777"/>
+              <a:srgbClr val="0D9488"/>
             </a:solidFill>
             <a:prstDash val="solid"/>
           </a:ln>
@@ -20074,7 +19923,7 @@
         </p:nvSpPr>
         <p:spPr>
           <a:xfrm>
-            <a:off x="4370832" y="2258568"/>
+            <a:off x="5803392" y="2258568"/>
             <a:ext cx="1828800" cy="292608"/>
           </a:xfrm>
           <a:prstGeom prst="rect">
@@ -20093,13 +19942,13 @@
             <a:r>
               <a:rPr lang="en-US" sz="1300" b="1" dirty="0">
                 <a:solidFill>
-                  <a:srgbClr val="9D174D"/>
+                  <a:srgbClr val="0F766E"/>
                 </a:solidFill>
                 <a:latin typeface="Trebuchet MS" pitchFamily="34" charset="0"/>
                 <a:ea typeface="Trebuchet MS" pitchFamily="34" charset="-122"/>
                 <a:cs typeface="Trebuchet MS" pitchFamily="34" charset="-120"/>
               </a:rPr>
-              <a:t>vers</a:t>
+              <a:t>vert</a:t>
             </a:r>
             <a:endParaRPr lang="en-US" sz="1300" dirty="0"/>
           </a:p>
@@ -20113,7 +19962,7 @@
         </p:nvSpPr>
         <p:spPr>
           <a:xfrm>
-            <a:off x="4370832" y="2569464"/>
+            <a:off x="5803392" y="2569464"/>
             <a:ext cx="1828800" cy="201168"/>
           </a:xfrm>
           <a:prstGeom prst="rect">
@@ -20146,87 +19995,41 @@
       </p:sp>
       <p:sp>
         <p:nvSpPr>
-          <p:cNvPr id="22" name="Text 20"/>
-          <p:cNvSpPr/>
-          <p:nvPr/>
-        </p:nvSpPr>
-        <p:spPr>
-          <a:xfrm>
-            <a:off x="4370832" y="2752344"/>
-            <a:ext cx="1828800" cy="182880"/>
-          </a:xfrm>
-          <a:prstGeom prst="rect">
-            <a:avLst/>
-          </a:prstGeom>
-          <a:noFill/>
-          <a:ln/>
-        </p:spPr>
-        <p:txBody>
-          <a:bodyPr wrap="square" lIns="0" tIns="0" rIns="0" bIns="0" rtlCol="0" anchor="t"/>
-          <a:lstStyle/>
-          <a:p>
-            <a:pPr algn="ctr" indent="0" marL="0">
-              <a:buNone/>
-            </a:pPr>
-            <a:r>
-              <a:rPr lang="en-US" sz="700" i="1" dirty="0">
-                <a:solidFill>
-                  <a:srgbClr val="94A3B8"/>
-                </a:solidFill>
-                <a:latin typeface="Calibri" pitchFamily="34" charset="0"/>
-                <a:ea typeface="Calibri" pitchFamily="34" charset="-122"/>
-                <a:cs typeface="Calibri" pitchFamily="34" charset="-120"/>
-              </a:rPr>
-              <a:t>vert → vers before the suffix '-ion'</a:t>
-            </a:r>
-            <a:endParaRPr lang="en-US" sz="700" dirty="0"/>
-          </a:p>
-        </p:txBody>
-      </p:sp>
-      <p:sp>
-        <p:nvSpPr>
-          <p:cNvPr id="23" name="Shape 21"/>
-          <p:cNvSpPr/>
-          <p:nvPr/>
-        </p:nvSpPr>
-        <p:spPr>
-          <a:xfrm>
-            <a:off x="6519672" y="2258568"/>
-            <a:ext cx="1828800" cy="292608"/>
+          <p:cNvPr id="22" name="Shape 20"/>
+          <p:cNvSpPr/>
+          <p:nvPr/>
+        </p:nvSpPr>
+        <p:spPr>
+          <a:xfrm>
+            <a:off x="365760" y="3273552"/>
+            <a:ext cx="1371600" cy="658368"/>
           </a:xfrm>
           <a:prstGeom prst="rect">
             <a:avLst>
-              <a:gd name="adj" fmla="val 25000"/>
+              <a:gd name="adj" fmla="val 8333"/>
             </a:avLst>
           </a:prstGeom>
           <a:solidFill>
-            <a:srgbClr val="FCE7F3"/>
-          </a:solidFill>
-          <a:ln w="19050">
-            <a:solidFill>
-              <a:srgbClr val="DB2777"/>
-            </a:solidFill>
-            <a:prstDash val="solid"/>
-          </a:ln>
-          <a:effectLst>
-            <a:outerShdw sx="100000" sy="100000" kx="0" ky="0" algn="bl" rotWithShape="0" blurRad="101600" dist="38100" dir="8100000">
-              <a:srgbClr val="000000">
-                <a:alpha val="12000"/>
-              </a:srgbClr>
-            </a:outerShdw>
-          </a:effectLst>
-        </p:spPr>
-      </p:sp>
-      <p:sp>
-        <p:nvSpPr>
-          <p:cNvPr id="24" name="Text 22"/>
-          <p:cNvSpPr/>
-          <p:nvPr/>
-        </p:nvSpPr>
-        <p:spPr>
-          <a:xfrm>
-            <a:off x="6519672" y="2258568"/>
-            <a:ext cx="1828800" cy="292608"/>
+            <a:srgbClr val="E2E8F0"/>
+          </a:solidFill>
+          <a:ln w="12700">
+            <a:solidFill>
+              <a:srgbClr val="E2E8F0"/>
+            </a:solidFill>
+            <a:prstDash val="solid"/>
+          </a:ln>
+        </p:spPr>
+      </p:sp>
+      <p:sp>
+        <p:nvSpPr>
+          <p:cNvPr id="23" name="Text 21"/>
+          <p:cNvSpPr/>
+          <p:nvPr/>
+        </p:nvSpPr>
+        <p:spPr>
+          <a:xfrm>
+            <a:off x="365760" y="3273552"/>
+            <a:ext cx="1371600" cy="658368"/>
           </a:xfrm>
           <a:prstGeom prst="rect">
             <a:avLst/>
@@ -20242,69 +20045,30 @@
               <a:buNone/>
             </a:pPr>
             <a:r>
-              <a:rPr lang="en-US" sz="1300" b="1" dirty="0">
-                <a:solidFill>
-                  <a:srgbClr val="9D174D"/>
+              <a:rPr lang="en-US" sz="1100" b="1" dirty="0">
+                <a:solidFill>
+                  <a:srgbClr val="475569"/>
                 </a:solidFill>
                 <a:latin typeface="Trebuchet MS" pitchFamily="34" charset="0"/>
                 <a:ea typeface="Trebuchet MS" pitchFamily="34" charset="-122"/>
                 <a:cs typeface="Trebuchet MS" pitchFamily="34" charset="-120"/>
               </a:rPr>
-              <a:t>ion</a:t>
-            </a:r>
-            <a:endParaRPr lang="en-US" sz="1300" dirty="0"/>
-          </a:p>
-        </p:txBody>
-      </p:sp>
-      <p:sp>
-        <p:nvSpPr>
-          <p:cNvPr id="25" name="Text 23"/>
-          <p:cNvSpPr/>
-          <p:nvPr/>
-        </p:nvSpPr>
-        <p:spPr>
-          <a:xfrm>
-            <a:off x="6519672" y="2569464"/>
-            <a:ext cx="1828800" cy="201168"/>
-          </a:xfrm>
-          <a:prstGeom prst="rect">
-            <a:avLst/>
-          </a:prstGeom>
-          <a:noFill/>
-          <a:ln/>
-        </p:spPr>
-        <p:txBody>
-          <a:bodyPr wrap="square" lIns="0" tIns="0" rIns="0" bIns="0" rtlCol="0" anchor="t"/>
-          <a:lstStyle/>
-          <a:p>
-            <a:pPr algn="ctr" indent="0" marL="0">
-              <a:buNone/>
-            </a:pPr>
-            <a:r>
-              <a:rPr lang="en-US" sz="850" dirty="0">
-                <a:solidFill>
-                  <a:srgbClr val="475569"/>
-                </a:solidFill>
-                <a:latin typeface="Calibri" pitchFamily="34" charset="0"/>
-                <a:ea typeface="Calibri" pitchFamily="34" charset="-122"/>
-                <a:cs typeface="Calibri" pitchFamily="34" charset="-120"/>
-              </a:rPr>
-              <a:t>act or result of</a:t>
-            </a:r>
-            <a:endParaRPr lang="en-US" sz="850" dirty="0"/>
-          </a:p>
-        </p:txBody>
-      </p:sp>
-      <p:sp>
-        <p:nvSpPr>
-          <p:cNvPr id="26" name="Shape 24"/>
-          <p:cNvSpPr/>
-          <p:nvPr/>
-        </p:nvSpPr>
-        <p:spPr>
-          <a:xfrm>
-            <a:off x="365760" y="3273552"/>
-            <a:ext cx="1371600" cy="658368"/>
+              <a:t>Syllables</a:t>
+            </a:r>
+            <a:endParaRPr lang="en-US" sz="1100" dirty="0"/>
+          </a:p>
+        </p:txBody>
+      </p:sp>
+      <p:sp>
+        <p:nvSpPr>
+          <p:cNvPr id="24" name="Shape 22"/>
+          <p:cNvSpPr/>
+          <p:nvPr/>
+        </p:nvSpPr>
+        <p:spPr>
+          <a:xfrm>
+            <a:off x="1874520" y="3273552"/>
+            <a:ext cx="6903720" cy="658368"/>
           </a:xfrm>
           <a:prstGeom prst="rect">
             <a:avLst>
@@ -20312,26 +20076,53 @@
             </a:avLst>
           </a:prstGeom>
           <a:solidFill>
-            <a:srgbClr val="E2E8F0"/>
-          </a:solidFill>
-          <a:ln w="12700">
-            <a:solidFill>
-              <a:srgbClr val="E2E8F0"/>
-            </a:solidFill>
-            <a:prstDash val="solid"/>
-          </a:ln>
-        </p:spPr>
-      </p:sp>
-      <p:sp>
-        <p:nvSpPr>
-          <p:cNvPr id="27" name="Text 25"/>
-          <p:cNvSpPr/>
-          <p:nvPr/>
-        </p:nvSpPr>
-        <p:spPr>
-          <a:xfrm>
-            <a:off x="365760" y="3273552"/>
-            <a:ext cx="1371600" cy="658368"/>
+            <a:srgbClr val="CCFBF1"/>
+          </a:solidFill>
+          <a:ln w="12700">
+            <a:solidFill>
+              <a:srgbClr val="0D9488"/>
+            </a:solidFill>
+            <a:prstDash val="solid"/>
+          </a:ln>
+        </p:spPr>
+      </p:sp>
+      <p:sp>
+        <p:nvSpPr>
+          <p:cNvPr id="25" name="Shape 23"/>
+          <p:cNvSpPr/>
+          <p:nvPr/>
+        </p:nvSpPr>
+        <p:spPr>
+          <a:xfrm>
+            <a:off x="2999232" y="3364992"/>
+            <a:ext cx="1645920" cy="475488"/>
+          </a:xfrm>
+          <a:prstGeom prst="rect">
+            <a:avLst>
+              <a:gd name="adj" fmla="val 9615"/>
+            </a:avLst>
+          </a:prstGeom>
+          <a:solidFill>
+            <a:srgbClr val="FFFFFF"/>
+          </a:solidFill>
+          <a:ln w="12700">
+            <a:solidFill>
+              <a:srgbClr val="0D9488"/>
+            </a:solidFill>
+            <a:prstDash val="solid"/>
+          </a:ln>
+        </p:spPr>
+      </p:sp>
+      <p:sp>
+        <p:nvSpPr>
+          <p:cNvPr id="26" name="Text 24"/>
+          <p:cNvSpPr/>
+          <p:nvPr/>
+        </p:nvSpPr>
+        <p:spPr>
+          <a:xfrm>
+            <a:off x="2999232" y="3364992"/>
+            <a:ext cx="1645920" cy="475488"/>
           </a:xfrm>
           <a:prstGeom prst="rect">
             <a:avLst/>
@@ -20347,17 +20138,56 @@
               <a:buNone/>
             </a:pPr>
             <a:r>
-              <a:rPr lang="en-US" sz="1100" b="1" dirty="0">
-                <a:solidFill>
-                  <a:srgbClr val="475569"/>
+              <a:rPr lang="en-US" sz="1400" b="1" dirty="0">
+                <a:solidFill>
+                  <a:srgbClr val="0D9488"/>
                 </a:solidFill>
                 <a:latin typeface="Trebuchet MS" pitchFamily="34" charset="0"/>
                 <a:ea typeface="Trebuchet MS" pitchFamily="34" charset="-122"/>
                 <a:cs typeface="Trebuchet MS" pitchFamily="34" charset="-120"/>
               </a:rPr>
-              <a:t>Syllables</a:t>
-            </a:r>
-            <a:endParaRPr lang="en-US" sz="1100" dirty="0"/>
+              <a:t>di</a:t>
+            </a:r>
+            <a:endParaRPr lang="en-US" sz="1400" dirty="0"/>
+          </a:p>
+        </p:txBody>
+      </p:sp>
+      <p:sp>
+        <p:nvSpPr>
+          <p:cNvPr id="27" name="Text 25"/>
+          <p:cNvSpPr/>
+          <p:nvPr/>
+        </p:nvSpPr>
+        <p:spPr>
+          <a:xfrm>
+            <a:off x="4645152" y="3364992"/>
+            <a:ext cx="1097280" cy="475488"/>
+          </a:xfrm>
+          <a:prstGeom prst="rect">
+            <a:avLst/>
+          </a:prstGeom>
+          <a:noFill/>
+          <a:ln/>
+        </p:spPr>
+        <p:txBody>
+          <a:bodyPr wrap="square" lIns="0" tIns="0" rIns="0" bIns="0" rtlCol="0" anchor="ctr"/>
+          <a:lstStyle/>
+          <a:p>
+            <a:pPr algn="ctr" indent="0" marL="0">
+              <a:buNone/>
+            </a:pPr>
+            <a:r>
+              <a:rPr lang="en-US" sz="1600" b="1" dirty="0">
+                <a:solidFill>
+                  <a:srgbClr val="0D9488"/>
+                </a:solidFill>
+                <a:latin typeface="Trebuchet MS" pitchFamily="34" charset="0"/>
+                <a:ea typeface="Trebuchet MS" pitchFamily="34" charset="-122"/>
+                <a:cs typeface="Trebuchet MS" pitchFamily="34" charset="-120"/>
+              </a:rPr>
+              <a:t>·</a:t>
+            </a:r>
+            <a:endParaRPr lang="en-US" sz="1600" dirty="0"/>
           </a:p>
         </p:txBody>
       </p:sp>
@@ -20369,34 +20199,7 @@
         </p:nvSpPr>
         <p:spPr>
           <a:xfrm>
-            <a:off x="1874520" y="3273552"/>
-            <a:ext cx="6903720" cy="658368"/>
-          </a:xfrm>
-          <a:prstGeom prst="rect">
-            <a:avLst>
-              <a:gd name="adj" fmla="val 8333"/>
-            </a:avLst>
-          </a:prstGeom>
-          <a:solidFill>
-            <a:srgbClr val="CCFBF1"/>
-          </a:solidFill>
-          <a:ln w="12700">
-            <a:solidFill>
-              <a:srgbClr val="0D9488"/>
-            </a:solidFill>
-            <a:prstDash val="solid"/>
-          </a:ln>
-        </p:spPr>
-      </p:sp>
-      <p:sp>
-        <p:nvSpPr>
-          <p:cNvPr id="29" name="Shape 27"/>
-          <p:cNvSpPr/>
-          <p:nvPr/>
-        </p:nvSpPr>
-        <p:spPr>
-          <a:xfrm>
-            <a:off x="2313432" y="3364992"/>
+            <a:off x="5742432" y="3364992"/>
             <a:ext cx="1645920" cy="475488"/>
           </a:xfrm>
           <a:prstGeom prst="rect">
@@ -20417,13 +20220,13 @@
       </p:sp>
       <p:sp>
         <p:nvSpPr>
-          <p:cNvPr id="30" name="Text 28"/>
-          <p:cNvSpPr/>
-          <p:nvPr/>
-        </p:nvSpPr>
-        <p:spPr>
-          <a:xfrm>
-            <a:off x="2313432" y="3364992"/>
+          <p:cNvPr id="29" name="Text 27"/>
+          <p:cNvSpPr/>
+          <p:nvPr/>
+        </p:nvSpPr>
+        <p:spPr>
+          <a:xfrm>
+            <a:off x="5742432" y="3364992"/>
             <a:ext cx="1645920" cy="475488"/>
           </a:xfrm>
           <a:prstGeom prst="rect">
@@ -20448,7 +20251,7 @@
                 <a:ea typeface="Trebuchet MS" pitchFamily="34" charset="-122"/>
                 <a:cs typeface="Trebuchet MS" pitchFamily="34" charset="-120"/>
               </a:rPr>
-              <a:t>in</a:t>
+              <a:t>vert</a:t>
             </a:r>
             <a:endParaRPr lang="en-US" sz="1400" dirty="0"/>
           </a:p>
@@ -20456,14 +20259,41 @@
       </p:sp>
       <p:sp>
         <p:nvSpPr>
+          <p:cNvPr id="30" name="Shape 28"/>
+          <p:cNvSpPr/>
+          <p:nvPr/>
+        </p:nvSpPr>
+        <p:spPr>
+          <a:xfrm>
+            <a:off x="365760" y="4096512"/>
+            <a:ext cx="1371600" cy="804672"/>
+          </a:xfrm>
+          <a:prstGeom prst="rect">
+            <a:avLst>
+              <a:gd name="adj" fmla="val 6818"/>
+            </a:avLst>
+          </a:prstGeom>
+          <a:solidFill>
+            <a:srgbClr val="E2E8F0"/>
+          </a:solidFill>
+          <a:ln w="12700">
+            <a:solidFill>
+              <a:srgbClr val="E2E8F0"/>
+            </a:solidFill>
+            <a:prstDash val="solid"/>
+          </a:ln>
+        </p:spPr>
+      </p:sp>
+      <p:sp>
+        <p:nvSpPr>
           <p:cNvPr id="31" name="Text 29"/>
           <p:cNvSpPr/>
           <p:nvPr/>
         </p:nvSpPr>
         <p:spPr>
           <a:xfrm>
-            <a:off x="3959352" y="3364992"/>
-            <a:ext cx="411480" cy="475488"/>
+            <a:off x="365760" y="4096512"/>
+            <a:ext cx="1371600" cy="804672"/>
           </a:xfrm>
           <a:prstGeom prst="rect">
             <a:avLst/>
@@ -20479,17 +20309,17 @@
               <a:buNone/>
             </a:pPr>
             <a:r>
-              <a:rPr lang="en-US" sz="1600" b="1" dirty="0">
-                <a:solidFill>
-                  <a:srgbClr val="0D9488"/>
+              <a:rPr lang="en-US" sz="1100" b="1" dirty="0">
+                <a:solidFill>
+                  <a:srgbClr val="475569"/>
                 </a:solidFill>
                 <a:latin typeface="Trebuchet MS" pitchFamily="34" charset="0"/>
                 <a:ea typeface="Trebuchet MS" pitchFamily="34" charset="-122"/>
                 <a:cs typeface="Trebuchet MS" pitchFamily="34" charset="-120"/>
               </a:rPr>
-              <a:t>·</a:t>
-            </a:r>
-            <a:endParaRPr lang="en-US" sz="1600" dirty="0"/>
+              <a:t>Phonemes</a:t>
+            </a:r>
+            <a:endParaRPr lang="en-US" sz="1100" dirty="0"/>
           </a:p>
         </p:txBody>
       </p:sp>
@@ -20501,179 +20331,8 @@
         </p:nvSpPr>
         <p:spPr>
           <a:xfrm>
-            <a:off x="4370832" y="3364992"/>
-            <a:ext cx="1645920" cy="475488"/>
-          </a:xfrm>
-          <a:prstGeom prst="rect">
-            <a:avLst>
-              <a:gd name="adj" fmla="val 9615"/>
-            </a:avLst>
-          </a:prstGeom>
-          <a:solidFill>
-            <a:srgbClr val="FFFFFF"/>
-          </a:solidFill>
-          <a:ln w="12700">
-            <a:solidFill>
-              <a:srgbClr val="0D9488"/>
-            </a:solidFill>
-            <a:prstDash val="solid"/>
-          </a:ln>
-        </p:spPr>
-      </p:sp>
-      <p:sp>
-        <p:nvSpPr>
-          <p:cNvPr id="33" name="Text 31"/>
-          <p:cNvSpPr/>
-          <p:nvPr/>
-        </p:nvSpPr>
-        <p:spPr>
-          <a:xfrm>
-            <a:off x="4370832" y="3364992"/>
-            <a:ext cx="1645920" cy="475488"/>
-          </a:xfrm>
-          <a:prstGeom prst="rect">
-            <a:avLst/>
-          </a:prstGeom>
-          <a:noFill/>
-          <a:ln/>
-        </p:spPr>
-        <p:txBody>
-          <a:bodyPr wrap="square" lIns="0" tIns="0" rIns="0" bIns="0" rtlCol="0" anchor="ctr"/>
-          <a:lstStyle/>
-          <a:p>
-            <a:pPr algn="ctr" indent="0" marL="0">
-              <a:buNone/>
-            </a:pPr>
-            <a:r>
-              <a:rPr lang="en-US" sz="1400" b="1" dirty="0">
-                <a:solidFill>
-                  <a:srgbClr val="0D9488"/>
-                </a:solidFill>
-                <a:latin typeface="Trebuchet MS" pitchFamily="34" charset="0"/>
-                <a:ea typeface="Trebuchet MS" pitchFamily="34" charset="-122"/>
-                <a:cs typeface="Trebuchet MS" pitchFamily="34" charset="-120"/>
-              </a:rPr>
-              <a:t>ver</a:t>
-            </a:r>
-            <a:endParaRPr lang="en-US" sz="1400" dirty="0"/>
-          </a:p>
-        </p:txBody>
-      </p:sp>
-      <p:sp>
-        <p:nvSpPr>
-          <p:cNvPr id="34" name="Text 32"/>
-          <p:cNvSpPr/>
-          <p:nvPr/>
-        </p:nvSpPr>
-        <p:spPr>
-          <a:xfrm>
-            <a:off x="6016752" y="3364992"/>
-            <a:ext cx="411480" cy="475488"/>
-          </a:xfrm>
-          <a:prstGeom prst="rect">
-            <a:avLst/>
-          </a:prstGeom>
-          <a:noFill/>
-          <a:ln/>
-        </p:spPr>
-        <p:txBody>
-          <a:bodyPr wrap="square" lIns="0" tIns="0" rIns="0" bIns="0" rtlCol="0" anchor="ctr"/>
-          <a:lstStyle/>
-          <a:p>
-            <a:pPr algn="ctr" indent="0" marL="0">
-              <a:buNone/>
-            </a:pPr>
-            <a:r>
-              <a:rPr lang="en-US" sz="1600" b="1" dirty="0">
-                <a:solidFill>
-                  <a:srgbClr val="0D9488"/>
-                </a:solidFill>
-                <a:latin typeface="Trebuchet MS" pitchFamily="34" charset="0"/>
-                <a:ea typeface="Trebuchet MS" pitchFamily="34" charset="-122"/>
-                <a:cs typeface="Trebuchet MS" pitchFamily="34" charset="-120"/>
-              </a:rPr>
-              <a:t>·</a:t>
-            </a:r>
-            <a:endParaRPr lang="en-US" sz="1600" dirty="0"/>
-          </a:p>
-        </p:txBody>
-      </p:sp>
-      <p:sp>
-        <p:nvSpPr>
-          <p:cNvPr id="35" name="Shape 33"/>
-          <p:cNvSpPr/>
-          <p:nvPr/>
-        </p:nvSpPr>
-        <p:spPr>
-          <a:xfrm>
-            <a:off x="6428232" y="3364992"/>
-            <a:ext cx="1645920" cy="475488"/>
-          </a:xfrm>
-          <a:prstGeom prst="rect">
-            <a:avLst>
-              <a:gd name="adj" fmla="val 9615"/>
-            </a:avLst>
-          </a:prstGeom>
-          <a:solidFill>
-            <a:srgbClr val="FFFFFF"/>
-          </a:solidFill>
-          <a:ln w="12700">
-            <a:solidFill>
-              <a:srgbClr val="0D9488"/>
-            </a:solidFill>
-            <a:prstDash val="solid"/>
-          </a:ln>
-        </p:spPr>
-      </p:sp>
-      <p:sp>
-        <p:nvSpPr>
-          <p:cNvPr id="36" name="Text 34"/>
-          <p:cNvSpPr/>
-          <p:nvPr/>
-        </p:nvSpPr>
-        <p:spPr>
-          <a:xfrm>
-            <a:off x="6428232" y="3364992"/>
-            <a:ext cx="1645920" cy="475488"/>
-          </a:xfrm>
-          <a:prstGeom prst="rect">
-            <a:avLst/>
-          </a:prstGeom>
-          <a:noFill/>
-          <a:ln/>
-        </p:spPr>
-        <p:txBody>
-          <a:bodyPr wrap="square" lIns="0" tIns="0" rIns="0" bIns="0" rtlCol="0" anchor="ctr"/>
-          <a:lstStyle/>
-          <a:p>
-            <a:pPr algn="ctr" indent="0" marL="0">
-              <a:buNone/>
-            </a:pPr>
-            <a:r>
-              <a:rPr lang="en-US" sz="1400" b="1" dirty="0">
-                <a:solidFill>
-                  <a:srgbClr val="0D9488"/>
-                </a:solidFill>
-                <a:latin typeface="Trebuchet MS" pitchFamily="34" charset="0"/>
-                <a:ea typeface="Trebuchet MS" pitchFamily="34" charset="-122"/>
-                <a:cs typeface="Trebuchet MS" pitchFamily="34" charset="-120"/>
-              </a:rPr>
-              <a:t>sion</a:t>
-            </a:r>
-            <a:endParaRPr lang="en-US" sz="1400" dirty="0"/>
-          </a:p>
-        </p:txBody>
-      </p:sp>
-      <p:sp>
-        <p:nvSpPr>
-          <p:cNvPr id="37" name="Shape 35"/>
-          <p:cNvSpPr/>
-          <p:nvPr/>
-        </p:nvSpPr>
-        <p:spPr>
-          <a:xfrm>
-            <a:off x="365760" y="4096512"/>
-            <a:ext cx="1371600" cy="804672"/>
+            <a:off x="1874520" y="4096512"/>
+            <a:ext cx="6903720" cy="804672"/>
           </a:xfrm>
           <a:prstGeom prst="rect">
             <a:avLst>
@@ -20681,85 +20340,19 @@
             </a:avLst>
           </a:prstGeom>
           <a:solidFill>
-            <a:srgbClr val="E2E8F0"/>
+            <a:srgbClr val="F8FAFC"/>
           </a:solidFill>
           <a:ln w="12700">
             <a:solidFill>
               <a:srgbClr val="E2E8F0"/>
             </a:solidFill>
-            <a:prstDash val="solid"/>
-          </a:ln>
-        </p:spPr>
-      </p:sp>
-      <p:sp>
-        <p:nvSpPr>
-          <p:cNvPr id="38" name="Text 36"/>
-          <p:cNvSpPr/>
-          <p:nvPr/>
-        </p:nvSpPr>
-        <p:spPr>
-          <a:xfrm>
-            <a:off x="365760" y="4096512"/>
-            <a:ext cx="1371600" cy="804672"/>
-          </a:xfrm>
-          <a:prstGeom prst="rect">
-            <a:avLst/>
-          </a:prstGeom>
-          <a:noFill/>
-          <a:ln/>
-        </p:spPr>
-        <p:txBody>
-          <a:bodyPr wrap="square" lIns="0" tIns="0" rIns="0" bIns="0" rtlCol="0" anchor="ctr"/>
-          <a:lstStyle/>
-          <a:p>
-            <a:pPr algn="ctr" indent="0" marL="0">
-              <a:buNone/>
-            </a:pPr>
-            <a:r>
-              <a:rPr lang="en-US" sz="1100" b="1" dirty="0">
-                <a:solidFill>
-                  <a:srgbClr val="475569"/>
-                </a:solidFill>
-                <a:latin typeface="Trebuchet MS" pitchFamily="34" charset="0"/>
-                <a:ea typeface="Trebuchet MS" pitchFamily="34" charset="-122"/>
-                <a:cs typeface="Trebuchet MS" pitchFamily="34" charset="-120"/>
-              </a:rPr>
-              <a:t>Phonemes</a:t>
-            </a:r>
-            <a:endParaRPr lang="en-US" sz="1100" dirty="0"/>
-          </a:p>
-        </p:txBody>
-      </p:sp>
-      <p:sp>
-        <p:nvSpPr>
-          <p:cNvPr id="39" name="Shape 37"/>
-          <p:cNvSpPr/>
-          <p:nvPr/>
-        </p:nvSpPr>
-        <p:spPr>
-          <a:xfrm>
-            <a:off x="1874520" y="4096512"/>
-            <a:ext cx="6903720" cy="804672"/>
-          </a:xfrm>
-          <a:prstGeom prst="rect">
-            <a:avLst>
-              <a:gd name="adj" fmla="val 6818"/>
-            </a:avLst>
-          </a:prstGeom>
-          <a:solidFill>
-            <a:srgbClr val="F8FAFC"/>
-          </a:solidFill>
-          <a:ln w="12700">
-            <a:solidFill>
-              <a:srgbClr val="E2E8F0"/>
-            </a:solidFill>
             <a:prstDash val="dash"/>
           </a:ln>
         </p:spPr>
       </p:sp>
       <p:sp>
         <p:nvSpPr>
-          <p:cNvPr id="40" name="Text 38"/>
+          <p:cNvPr id="33" name="Text 31"/>
           <p:cNvSpPr/>
           <p:nvPr/>
         </p:nvSpPr>
@@ -21221,7 +20814,7 @@
                 <a:ea typeface="Trebuchet MS" pitchFamily="34" charset="-122"/>
                 <a:cs typeface="Trebuchet MS" pitchFamily="34" charset="-120"/>
               </a:rPr>
-              <a:t>inversion</a:t>
+              <a:t>divert</a:t>
             </a:r>
             <a:endParaRPr lang="en-US" sz="2800" dirty="0"/>
           </a:p>
@@ -21301,7 +20894,7 @@
         </p:nvSpPr>
         <p:spPr>
           <a:xfrm>
-            <a:off x="2221992" y="2258568"/>
+            <a:off x="2938272" y="2258568"/>
             <a:ext cx="1828800" cy="292608"/>
           </a:xfrm>
           <a:prstGeom prst="rect">
@@ -21335,7 +20928,7 @@
         </p:nvSpPr>
         <p:spPr>
           <a:xfrm>
-            <a:off x="2221992" y="2258568"/>
+            <a:off x="2938272" y="2258568"/>
             <a:ext cx="1828800" cy="292608"/>
           </a:xfrm>
           <a:prstGeom prst="rect">
@@ -21360,7 +20953,7 @@
                 <a:ea typeface="Trebuchet MS" pitchFamily="34" charset="-122"/>
                 <a:cs typeface="Trebuchet MS" pitchFamily="34" charset="-120"/>
               </a:rPr>
-              <a:t>in</a:t>
+              <a:t>di</a:t>
             </a:r>
             <a:endParaRPr lang="en-US" sz="1300" dirty="0"/>
           </a:p>
@@ -21374,7 +20967,7 @@
         </p:nvSpPr>
         <p:spPr>
           <a:xfrm>
-            <a:off x="2221992" y="2569464"/>
+            <a:off x="2938272" y="2569464"/>
             <a:ext cx="1828800" cy="201168"/>
           </a:xfrm>
           <a:prstGeom prst="rect">
@@ -21399,7 +20992,7 @@
                 <a:ea typeface="Calibri" pitchFamily="34" charset="-122"/>
                 <a:cs typeface="Calibri" pitchFamily="34" charset="-120"/>
               </a:rPr>
-              <a:t>into, upon</a:t>
+              <a:t>away, apart</a:t>
             </a:r>
             <a:endParaRPr lang="en-US" sz="850" dirty="0"/>
           </a:p>
@@ -21413,7 +21006,7 @@
         </p:nvSpPr>
         <p:spPr>
           <a:xfrm>
-            <a:off x="4370832" y="2258568"/>
+            <a:off x="5803392" y="2258568"/>
             <a:ext cx="1828800" cy="292608"/>
           </a:xfrm>
           <a:prstGeom prst="rect">
@@ -21422,11 +21015,11 @@
             </a:avLst>
           </a:prstGeom>
           <a:solidFill>
-            <a:srgbClr val="FCE7F3"/>
+            <a:srgbClr val="CCFBF1"/>
           </a:solidFill>
           <a:ln w="19050">
             <a:solidFill>
-              <a:srgbClr val="DB2777"/>
+              <a:srgbClr val="0D9488"/>
             </a:solidFill>
             <a:prstDash val="solid"/>
           </a:ln>
@@ -21447,7 +21040,7 @@
         </p:nvSpPr>
         <p:spPr>
           <a:xfrm>
-            <a:off x="4370832" y="2258568"/>
+            <a:off x="5803392" y="2258568"/>
             <a:ext cx="1828800" cy="292608"/>
           </a:xfrm>
           <a:prstGeom prst="rect">
@@ -21466,13 +21059,13 @@
             <a:r>
               <a:rPr lang="en-US" sz="1300" b="1" dirty="0">
                 <a:solidFill>
-                  <a:srgbClr val="9D174D"/>
+                  <a:srgbClr val="0F766E"/>
                 </a:solidFill>
                 <a:latin typeface="Trebuchet MS" pitchFamily="34" charset="0"/>
                 <a:ea typeface="Trebuchet MS" pitchFamily="34" charset="-122"/>
                 <a:cs typeface="Trebuchet MS" pitchFamily="34" charset="-120"/>
               </a:rPr>
-              <a:t>vers</a:t>
+              <a:t>vert</a:t>
             </a:r>
             <a:endParaRPr lang="en-US" sz="1300" dirty="0"/>
           </a:p>
@@ -21486,7 +21079,7 @@
         </p:nvSpPr>
         <p:spPr>
           <a:xfrm>
-            <a:off x="4370832" y="2569464"/>
+            <a:off x="5803392" y="2569464"/>
             <a:ext cx="1828800" cy="201168"/>
           </a:xfrm>
           <a:prstGeom prst="rect">
@@ -21519,87 +21112,41 @@
       </p:sp>
       <p:sp>
         <p:nvSpPr>
-          <p:cNvPr id="22" name="Text 20"/>
-          <p:cNvSpPr/>
-          <p:nvPr/>
-        </p:nvSpPr>
-        <p:spPr>
-          <a:xfrm>
-            <a:off x="4370832" y="2752344"/>
-            <a:ext cx="1828800" cy="182880"/>
-          </a:xfrm>
-          <a:prstGeom prst="rect">
-            <a:avLst/>
-          </a:prstGeom>
-          <a:noFill/>
-          <a:ln/>
-        </p:spPr>
-        <p:txBody>
-          <a:bodyPr wrap="square" lIns="0" tIns="0" rIns="0" bIns="0" rtlCol="0" anchor="t"/>
-          <a:lstStyle/>
-          <a:p>
-            <a:pPr algn="ctr" indent="0" marL="0">
-              <a:buNone/>
-            </a:pPr>
-            <a:r>
-              <a:rPr lang="en-US" sz="700" i="1" dirty="0">
-                <a:solidFill>
-                  <a:srgbClr val="94A3B8"/>
-                </a:solidFill>
-                <a:latin typeface="Calibri" pitchFamily="34" charset="0"/>
-                <a:ea typeface="Calibri" pitchFamily="34" charset="-122"/>
-                <a:cs typeface="Calibri" pitchFamily="34" charset="-120"/>
-              </a:rPr>
-              <a:t>vert → vers before the suffix '-ion'</a:t>
-            </a:r>
-            <a:endParaRPr lang="en-US" sz="700" dirty="0"/>
-          </a:p>
-        </p:txBody>
-      </p:sp>
-      <p:sp>
-        <p:nvSpPr>
-          <p:cNvPr id="23" name="Shape 21"/>
-          <p:cNvSpPr/>
-          <p:nvPr/>
-        </p:nvSpPr>
-        <p:spPr>
-          <a:xfrm>
-            <a:off x="6519672" y="2258568"/>
-            <a:ext cx="1828800" cy="292608"/>
+          <p:cNvPr id="22" name="Shape 20"/>
+          <p:cNvSpPr/>
+          <p:nvPr/>
+        </p:nvSpPr>
+        <p:spPr>
+          <a:xfrm>
+            <a:off x="365760" y="3273552"/>
+            <a:ext cx="1371600" cy="658368"/>
           </a:xfrm>
           <a:prstGeom prst="rect">
             <a:avLst>
-              <a:gd name="adj" fmla="val 25000"/>
+              <a:gd name="adj" fmla="val 8333"/>
             </a:avLst>
           </a:prstGeom>
           <a:solidFill>
-            <a:srgbClr val="FCE7F3"/>
-          </a:solidFill>
-          <a:ln w="19050">
-            <a:solidFill>
-              <a:srgbClr val="DB2777"/>
-            </a:solidFill>
-            <a:prstDash val="solid"/>
-          </a:ln>
-          <a:effectLst>
-            <a:outerShdw sx="100000" sy="100000" kx="0" ky="0" algn="bl" rotWithShape="0" blurRad="101600" dist="38100" dir="8100000">
-              <a:srgbClr val="000000">
-                <a:alpha val="12000"/>
-              </a:srgbClr>
-            </a:outerShdw>
-          </a:effectLst>
-        </p:spPr>
-      </p:sp>
-      <p:sp>
-        <p:nvSpPr>
-          <p:cNvPr id="24" name="Text 22"/>
-          <p:cNvSpPr/>
-          <p:nvPr/>
-        </p:nvSpPr>
-        <p:spPr>
-          <a:xfrm>
-            <a:off x="6519672" y="2258568"/>
-            <a:ext cx="1828800" cy="292608"/>
+            <a:srgbClr val="E2E8F0"/>
+          </a:solidFill>
+          <a:ln w="12700">
+            <a:solidFill>
+              <a:srgbClr val="E2E8F0"/>
+            </a:solidFill>
+            <a:prstDash val="solid"/>
+          </a:ln>
+        </p:spPr>
+      </p:sp>
+      <p:sp>
+        <p:nvSpPr>
+          <p:cNvPr id="23" name="Text 21"/>
+          <p:cNvSpPr/>
+          <p:nvPr/>
+        </p:nvSpPr>
+        <p:spPr>
+          <a:xfrm>
+            <a:off x="365760" y="3273552"/>
+            <a:ext cx="1371600" cy="658368"/>
           </a:xfrm>
           <a:prstGeom prst="rect">
             <a:avLst/>
@@ -21615,69 +21162,30 @@
               <a:buNone/>
             </a:pPr>
             <a:r>
-              <a:rPr lang="en-US" sz="1300" b="1" dirty="0">
-                <a:solidFill>
-                  <a:srgbClr val="9D174D"/>
+              <a:rPr lang="en-US" sz="1100" b="1" dirty="0">
+                <a:solidFill>
+                  <a:srgbClr val="475569"/>
                 </a:solidFill>
                 <a:latin typeface="Trebuchet MS" pitchFamily="34" charset="0"/>
                 <a:ea typeface="Trebuchet MS" pitchFamily="34" charset="-122"/>
                 <a:cs typeface="Trebuchet MS" pitchFamily="34" charset="-120"/>
               </a:rPr>
-              <a:t>ion</a:t>
-            </a:r>
-            <a:endParaRPr lang="en-US" sz="1300" dirty="0"/>
-          </a:p>
-        </p:txBody>
-      </p:sp>
-      <p:sp>
-        <p:nvSpPr>
-          <p:cNvPr id="25" name="Text 23"/>
-          <p:cNvSpPr/>
-          <p:nvPr/>
-        </p:nvSpPr>
-        <p:spPr>
-          <a:xfrm>
-            <a:off x="6519672" y="2569464"/>
-            <a:ext cx="1828800" cy="201168"/>
-          </a:xfrm>
-          <a:prstGeom prst="rect">
-            <a:avLst/>
-          </a:prstGeom>
-          <a:noFill/>
-          <a:ln/>
-        </p:spPr>
-        <p:txBody>
-          <a:bodyPr wrap="square" lIns="0" tIns="0" rIns="0" bIns="0" rtlCol="0" anchor="t"/>
-          <a:lstStyle/>
-          <a:p>
-            <a:pPr algn="ctr" indent="0" marL="0">
-              <a:buNone/>
-            </a:pPr>
-            <a:r>
-              <a:rPr lang="en-US" sz="850" dirty="0">
-                <a:solidFill>
-                  <a:srgbClr val="475569"/>
-                </a:solidFill>
-                <a:latin typeface="Calibri" pitchFamily="34" charset="0"/>
-                <a:ea typeface="Calibri" pitchFamily="34" charset="-122"/>
-                <a:cs typeface="Calibri" pitchFamily="34" charset="-120"/>
-              </a:rPr>
-              <a:t>act or result of</a:t>
-            </a:r>
-            <a:endParaRPr lang="en-US" sz="850" dirty="0"/>
-          </a:p>
-        </p:txBody>
-      </p:sp>
-      <p:sp>
-        <p:nvSpPr>
-          <p:cNvPr id="26" name="Shape 24"/>
-          <p:cNvSpPr/>
-          <p:nvPr/>
-        </p:nvSpPr>
-        <p:spPr>
-          <a:xfrm>
-            <a:off x="365760" y="3273552"/>
-            <a:ext cx="1371600" cy="658368"/>
+              <a:t>Syllables</a:t>
+            </a:r>
+            <a:endParaRPr lang="en-US" sz="1100" dirty="0"/>
+          </a:p>
+        </p:txBody>
+      </p:sp>
+      <p:sp>
+        <p:nvSpPr>
+          <p:cNvPr id="24" name="Shape 22"/>
+          <p:cNvSpPr/>
+          <p:nvPr/>
+        </p:nvSpPr>
+        <p:spPr>
+          <a:xfrm>
+            <a:off x="1874520" y="3273552"/>
+            <a:ext cx="6903720" cy="658368"/>
           </a:xfrm>
           <a:prstGeom prst="rect">
             <a:avLst>
@@ -21685,26 +21193,53 @@
             </a:avLst>
           </a:prstGeom>
           <a:solidFill>
-            <a:srgbClr val="E2E8F0"/>
-          </a:solidFill>
-          <a:ln w="12700">
-            <a:solidFill>
-              <a:srgbClr val="E2E8F0"/>
-            </a:solidFill>
-            <a:prstDash val="solid"/>
-          </a:ln>
-        </p:spPr>
-      </p:sp>
-      <p:sp>
-        <p:nvSpPr>
-          <p:cNvPr id="27" name="Text 25"/>
-          <p:cNvSpPr/>
-          <p:nvPr/>
-        </p:nvSpPr>
-        <p:spPr>
-          <a:xfrm>
-            <a:off x="365760" y="3273552"/>
-            <a:ext cx="1371600" cy="658368"/>
+            <a:srgbClr val="CCFBF1"/>
+          </a:solidFill>
+          <a:ln w="12700">
+            <a:solidFill>
+              <a:srgbClr val="0D9488"/>
+            </a:solidFill>
+            <a:prstDash val="solid"/>
+          </a:ln>
+        </p:spPr>
+      </p:sp>
+      <p:sp>
+        <p:nvSpPr>
+          <p:cNvPr id="25" name="Shape 23"/>
+          <p:cNvSpPr/>
+          <p:nvPr/>
+        </p:nvSpPr>
+        <p:spPr>
+          <a:xfrm>
+            <a:off x="2999232" y="3364992"/>
+            <a:ext cx="1645920" cy="475488"/>
+          </a:xfrm>
+          <a:prstGeom prst="rect">
+            <a:avLst>
+              <a:gd name="adj" fmla="val 9615"/>
+            </a:avLst>
+          </a:prstGeom>
+          <a:solidFill>
+            <a:srgbClr val="FFFFFF"/>
+          </a:solidFill>
+          <a:ln w="12700">
+            <a:solidFill>
+              <a:srgbClr val="0D9488"/>
+            </a:solidFill>
+            <a:prstDash val="solid"/>
+          </a:ln>
+        </p:spPr>
+      </p:sp>
+      <p:sp>
+        <p:nvSpPr>
+          <p:cNvPr id="26" name="Text 24"/>
+          <p:cNvSpPr/>
+          <p:nvPr/>
+        </p:nvSpPr>
+        <p:spPr>
+          <a:xfrm>
+            <a:off x="2999232" y="3364992"/>
+            <a:ext cx="1645920" cy="475488"/>
           </a:xfrm>
           <a:prstGeom prst="rect">
             <a:avLst/>
@@ -21720,15 +21255,186 @@
               <a:buNone/>
             </a:pPr>
             <a:r>
-              <a:rPr lang="en-US" sz="1100" b="1" dirty="0">
-                <a:solidFill>
-                  <a:srgbClr val="475569"/>
+              <a:rPr lang="en-US" sz="1400" b="1" dirty="0">
+                <a:solidFill>
+                  <a:srgbClr val="0D9488"/>
                 </a:solidFill>
                 <a:latin typeface="Trebuchet MS" pitchFamily="34" charset="0"/>
                 <a:ea typeface="Trebuchet MS" pitchFamily="34" charset="-122"/>
                 <a:cs typeface="Trebuchet MS" pitchFamily="34" charset="-120"/>
               </a:rPr>
-              <a:t>Syllables</a:t>
+              <a:t>di</a:t>
+            </a:r>
+            <a:endParaRPr lang="en-US" sz="1400" dirty="0"/>
+          </a:p>
+        </p:txBody>
+      </p:sp>
+      <p:sp>
+        <p:nvSpPr>
+          <p:cNvPr id="27" name="Text 25"/>
+          <p:cNvSpPr/>
+          <p:nvPr/>
+        </p:nvSpPr>
+        <p:spPr>
+          <a:xfrm>
+            <a:off x="4645152" y="3364992"/>
+            <a:ext cx="1097280" cy="475488"/>
+          </a:xfrm>
+          <a:prstGeom prst="rect">
+            <a:avLst/>
+          </a:prstGeom>
+          <a:noFill/>
+          <a:ln/>
+        </p:spPr>
+        <p:txBody>
+          <a:bodyPr wrap="square" lIns="0" tIns="0" rIns="0" bIns="0" rtlCol="0" anchor="ctr"/>
+          <a:lstStyle/>
+          <a:p>
+            <a:pPr algn="ctr" indent="0" marL="0">
+              <a:buNone/>
+            </a:pPr>
+            <a:r>
+              <a:rPr lang="en-US" sz="1600" b="1" dirty="0">
+                <a:solidFill>
+                  <a:srgbClr val="0D9488"/>
+                </a:solidFill>
+                <a:latin typeface="Trebuchet MS" pitchFamily="34" charset="0"/>
+                <a:ea typeface="Trebuchet MS" pitchFamily="34" charset="-122"/>
+                <a:cs typeface="Trebuchet MS" pitchFamily="34" charset="-120"/>
+              </a:rPr>
+              <a:t>·</a:t>
+            </a:r>
+            <a:endParaRPr lang="en-US" sz="1600" dirty="0"/>
+          </a:p>
+        </p:txBody>
+      </p:sp>
+      <p:sp>
+        <p:nvSpPr>
+          <p:cNvPr id="28" name="Shape 26"/>
+          <p:cNvSpPr/>
+          <p:nvPr/>
+        </p:nvSpPr>
+        <p:spPr>
+          <a:xfrm>
+            <a:off x="5742432" y="3364992"/>
+            <a:ext cx="1645920" cy="475488"/>
+          </a:xfrm>
+          <a:prstGeom prst="rect">
+            <a:avLst>
+              <a:gd name="adj" fmla="val 9615"/>
+            </a:avLst>
+          </a:prstGeom>
+          <a:solidFill>
+            <a:srgbClr val="FFFFFF"/>
+          </a:solidFill>
+          <a:ln w="12700">
+            <a:solidFill>
+              <a:srgbClr val="0D9488"/>
+            </a:solidFill>
+            <a:prstDash val="solid"/>
+          </a:ln>
+        </p:spPr>
+      </p:sp>
+      <p:sp>
+        <p:nvSpPr>
+          <p:cNvPr id="29" name="Text 27"/>
+          <p:cNvSpPr/>
+          <p:nvPr/>
+        </p:nvSpPr>
+        <p:spPr>
+          <a:xfrm>
+            <a:off x="5742432" y="3364992"/>
+            <a:ext cx="1645920" cy="475488"/>
+          </a:xfrm>
+          <a:prstGeom prst="rect">
+            <a:avLst/>
+          </a:prstGeom>
+          <a:noFill/>
+          <a:ln/>
+        </p:spPr>
+        <p:txBody>
+          <a:bodyPr wrap="square" lIns="0" tIns="0" rIns="0" bIns="0" rtlCol="0" anchor="ctr"/>
+          <a:lstStyle/>
+          <a:p>
+            <a:pPr algn="ctr" indent="0" marL="0">
+              <a:buNone/>
+            </a:pPr>
+            <a:r>
+              <a:rPr lang="en-US" sz="1400" b="1" dirty="0">
+                <a:solidFill>
+                  <a:srgbClr val="0D9488"/>
+                </a:solidFill>
+                <a:latin typeface="Trebuchet MS" pitchFamily="34" charset="0"/>
+                <a:ea typeface="Trebuchet MS" pitchFamily="34" charset="-122"/>
+                <a:cs typeface="Trebuchet MS" pitchFamily="34" charset="-120"/>
+              </a:rPr>
+              <a:t>vert</a:t>
+            </a:r>
+            <a:endParaRPr lang="en-US" sz="1400" dirty="0"/>
+          </a:p>
+        </p:txBody>
+      </p:sp>
+      <p:sp>
+        <p:nvSpPr>
+          <p:cNvPr id="30" name="Shape 28"/>
+          <p:cNvSpPr/>
+          <p:nvPr/>
+        </p:nvSpPr>
+        <p:spPr>
+          <a:xfrm>
+            <a:off x="365760" y="4096512"/>
+            <a:ext cx="1371600" cy="804672"/>
+          </a:xfrm>
+          <a:prstGeom prst="rect">
+            <a:avLst>
+              <a:gd name="adj" fmla="val 6818"/>
+            </a:avLst>
+          </a:prstGeom>
+          <a:solidFill>
+            <a:srgbClr val="E2E8F0"/>
+          </a:solidFill>
+          <a:ln w="12700">
+            <a:solidFill>
+              <a:srgbClr val="E2E8F0"/>
+            </a:solidFill>
+            <a:prstDash val="solid"/>
+          </a:ln>
+        </p:spPr>
+      </p:sp>
+      <p:sp>
+        <p:nvSpPr>
+          <p:cNvPr id="31" name="Text 29"/>
+          <p:cNvSpPr/>
+          <p:nvPr/>
+        </p:nvSpPr>
+        <p:spPr>
+          <a:xfrm>
+            <a:off x="365760" y="4096512"/>
+            <a:ext cx="1371600" cy="804672"/>
+          </a:xfrm>
+          <a:prstGeom prst="rect">
+            <a:avLst/>
+          </a:prstGeom>
+          <a:noFill/>
+          <a:ln/>
+        </p:spPr>
+        <p:txBody>
+          <a:bodyPr wrap="square" lIns="0" tIns="0" rIns="0" bIns="0" rtlCol="0" anchor="ctr"/>
+          <a:lstStyle/>
+          <a:p>
+            <a:pPr algn="ctr" indent="0" marL="0">
+              <a:buNone/>
+            </a:pPr>
+            <a:r>
+              <a:rPr lang="en-US" sz="1100" b="1" dirty="0">
+                <a:solidFill>
+                  <a:srgbClr val="475569"/>
+                </a:solidFill>
+                <a:latin typeface="Trebuchet MS" pitchFamily="34" charset="0"/>
+                <a:ea typeface="Trebuchet MS" pitchFamily="34" charset="-122"/>
+                <a:cs typeface="Trebuchet MS" pitchFamily="34" charset="-120"/>
+              </a:rPr>
+              <a:t>Phonemes</a:t>
             </a:r>
             <a:endParaRPr lang="en-US" sz="1100" dirty="0"/>
           </a:p>
@@ -21736,13 +21442,13 @@
       </p:sp>
       <p:sp>
         <p:nvSpPr>
-          <p:cNvPr id="28" name="Shape 26"/>
-          <p:cNvSpPr/>
-          <p:nvPr/>
-        </p:nvSpPr>
-        <p:spPr>
-          <a:xfrm>
-            <a:off x="1874520" y="3273552"/>
+          <p:cNvPr id="32" name="Shape 30"/>
+          <p:cNvSpPr/>
+          <p:nvPr/>
+        </p:nvSpPr>
+        <p:spPr>
+          <a:xfrm>
+            <a:off x="1874520" y="4096512"/>
             <a:ext cx="6903720" cy="658368"/>
           </a:xfrm>
           <a:prstGeom prst="rect">
@@ -21751,30 +21457,30 @@
             </a:avLst>
           </a:prstGeom>
           <a:solidFill>
-            <a:srgbClr val="CCFBF1"/>
-          </a:solidFill>
-          <a:ln w="12700">
-            <a:solidFill>
-              <a:srgbClr val="0D9488"/>
-            </a:solidFill>
-            <a:prstDash val="solid"/>
-          </a:ln>
-        </p:spPr>
-      </p:sp>
-      <p:sp>
-        <p:nvSpPr>
-          <p:cNvPr id="29" name="Shape 27"/>
-          <p:cNvSpPr/>
-          <p:nvPr/>
-        </p:nvSpPr>
-        <p:spPr>
-          <a:xfrm>
-            <a:off x="2313432" y="3364992"/>
-            <a:ext cx="1645920" cy="475488"/>
+            <a:srgbClr val="FCE7F3"/>
+          </a:solidFill>
+          <a:ln w="12700">
+            <a:solidFill>
+              <a:srgbClr val="DB2777"/>
+            </a:solidFill>
+            <a:prstDash val="solid"/>
+          </a:ln>
+        </p:spPr>
+      </p:sp>
+      <p:sp>
+        <p:nvSpPr>
+          <p:cNvPr id="33" name="Shape 31"/>
+          <p:cNvSpPr/>
+          <p:nvPr/>
+        </p:nvSpPr>
+        <p:spPr>
+          <a:xfrm>
+            <a:off x="2427732" y="4169664"/>
+            <a:ext cx="685800" cy="475488"/>
           </a:xfrm>
           <a:prstGeom prst="rect">
             <a:avLst>
-              <a:gd name="adj" fmla="val 9615"/>
+              <a:gd name="adj" fmla="val 7692"/>
             </a:avLst>
           </a:prstGeom>
           <a:solidFill>
@@ -21782,22 +21488,22 @@
           </a:solidFill>
           <a:ln w="12700">
             <a:solidFill>
-              <a:srgbClr val="0D9488"/>
-            </a:solidFill>
-            <a:prstDash val="solid"/>
-          </a:ln>
-        </p:spPr>
-      </p:sp>
-      <p:sp>
-        <p:nvSpPr>
-          <p:cNvPr id="30" name="Text 28"/>
-          <p:cNvSpPr/>
-          <p:nvPr/>
-        </p:nvSpPr>
-        <p:spPr>
-          <a:xfrm>
-            <a:off x="2313432" y="3364992"/>
-            <a:ext cx="1645920" cy="475488"/>
+              <a:srgbClr val="DB2777"/>
+            </a:solidFill>
+            <a:prstDash val="solid"/>
+          </a:ln>
+        </p:spPr>
+      </p:sp>
+      <p:sp>
+        <p:nvSpPr>
+          <p:cNvPr id="34" name="Text 32"/>
+          <p:cNvSpPr/>
+          <p:nvPr/>
+        </p:nvSpPr>
+        <p:spPr>
+          <a:xfrm>
+            <a:off x="2427732" y="4169664"/>
+            <a:ext cx="685800" cy="475488"/>
           </a:xfrm>
           <a:prstGeom prst="rect">
             <a:avLst/>
@@ -21813,30 +21519,57 @@
               <a:buNone/>
             </a:pPr>
             <a:r>
-              <a:rPr lang="en-US" sz="1400" b="1" dirty="0">
-                <a:solidFill>
-                  <a:srgbClr val="0D9488"/>
+              <a:rPr lang="en-US" sz="900" b="1" dirty="0">
+                <a:solidFill>
+                  <a:srgbClr val="9D174D"/>
                 </a:solidFill>
                 <a:latin typeface="Trebuchet MS" pitchFamily="34" charset="0"/>
                 <a:ea typeface="Trebuchet MS" pitchFamily="34" charset="-122"/>
                 <a:cs typeface="Trebuchet MS" pitchFamily="34" charset="-120"/>
               </a:rPr>
-              <a:t>in</a:t>
-            </a:r>
-            <a:endParaRPr lang="en-US" sz="1400" dirty="0"/>
-          </a:p>
-        </p:txBody>
-      </p:sp>
-      <p:sp>
-        <p:nvSpPr>
-          <p:cNvPr id="31" name="Text 29"/>
-          <p:cNvSpPr/>
-          <p:nvPr/>
-        </p:nvSpPr>
-        <p:spPr>
-          <a:xfrm>
-            <a:off x="3959352" y="3364992"/>
-            <a:ext cx="411480" cy="475488"/>
+              <a:t>d</a:t>
+            </a:r>
+            <a:endParaRPr lang="en-US" sz="900" dirty="0"/>
+          </a:p>
+        </p:txBody>
+      </p:sp>
+      <p:sp>
+        <p:nvSpPr>
+          <p:cNvPr id="35" name="Shape 33"/>
+          <p:cNvSpPr/>
+          <p:nvPr/>
+        </p:nvSpPr>
+        <p:spPr>
+          <a:xfrm>
+            <a:off x="3639312" y="4169664"/>
+            <a:ext cx="685800" cy="475488"/>
+          </a:xfrm>
+          <a:prstGeom prst="rect">
+            <a:avLst>
+              <a:gd name="adj" fmla="val 7692"/>
+            </a:avLst>
+          </a:prstGeom>
+          <a:solidFill>
+            <a:srgbClr val="FFFFFF"/>
+          </a:solidFill>
+          <a:ln w="12700">
+            <a:solidFill>
+              <a:srgbClr val="DB2777"/>
+            </a:solidFill>
+            <a:prstDash val="solid"/>
+          </a:ln>
+        </p:spPr>
+      </p:sp>
+      <p:sp>
+        <p:nvSpPr>
+          <p:cNvPr id="36" name="Text 34"/>
+          <p:cNvSpPr/>
+          <p:nvPr/>
+        </p:nvSpPr>
+        <p:spPr>
+          <a:xfrm>
+            <a:off x="3639312" y="4169664"/>
+            <a:ext cx="685800" cy="475488"/>
           </a:xfrm>
           <a:prstGeom prst="rect">
             <a:avLst/>
@@ -21852,34 +21585,34 @@
               <a:buNone/>
             </a:pPr>
             <a:r>
-              <a:rPr lang="en-US" sz="1600" b="1" dirty="0">
-                <a:solidFill>
-                  <a:srgbClr val="0D9488"/>
+              <a:rPr lang="en-US" sz="900" b="1" dirty="0">
+                <a:solidFill>
+                  <a:srgbClr val="9D174D"/>
                 </a:solidFill>
                 <a:latin typeface="Trebuchet MS" pitchFamily="34" charset="0"/>
                 <a:ea typeface="Trebuchet MS" pitchFamily="34" charset="-122"/>
                 <a:cs typeface="Trebuchet MS" pitchFamily="34" charset="-120"/>
               </a:rPr>
-              <a:t>·</a:t>
-            </a:r>
-            <a:endParaRPr lang="en-US" sz="1600" dirty="0"/>
-          </a:p>
-        </p:txBody>
-      </p:sp>
-      <p:sp>
-        <p:nvSpPr>
-          <p:cNvPr id="32" name="Shape 30"/>
-          <p:cNvSpPr/>
-          <p:nvPr/>
-        </p:nvSpPr>
-        <p:spPr>
-          <a:xfrm>
-            <a:off x="4370832" y="3364992"/>
-            <a:ext cx="1645920" cy="475488"/>
+              <a:t>i</a:t>
+            </a:r>
+            <a:endParaRPr lang="en-US" sz="900" dirty="0"/>
+          </a:p>
+        </p:txBody>
+      </p:sp>
+      <p:sp>
+        <p:nvSpPr>
+          <p:cNvPr id="37" name="Shape 35"/>
+          <p:cNvSpPr/>
+          <p:nvPr/>
+        </p:nvSpPr>
+        <p:spPr>
+          <a:xfrm>
+            <a:off x="4850892" y="4169664"/>
+            <a:ext cx="685800" cy="475488"/>
           </a:xfrm>
           <a:prstGeom prst="rect">
             <a:avLst>
-              <a:gd name="adj" fmla="val 9615"/>
+              <a:gd name="adj" fmla="val 7692"/>
             </a:avLst>
           </a:prstGeom>
           <a:solidFill>
@@ -21887,22 +21620,22 @@
           </a:solidFill>
           <a:ln w="12700">
             <a:solidFill>
-              <a:srgbClr val="0D9488"/>
-            </a:solidFill>
-            <a:prstDash val="solid"/>
-          </a:ln>
-        </p:spPr>
-      </p:sp>
-      <p:sp>
-        <p:nvSpPr>
-          <p:cNvPr id="33" name="Text 31"/>
-          <p:cNvSpPr/>
-          <p:nvPr/>
-        </p:nvSpPr>
-        <p:spPr>
-          <a:xfrm>
-            <a:off x="4370832" y="3364992"/>
-            <a:ext cx="1645920" cy="475488"/>
+              <a:srgbClr val="DB2777"/>
+            </a:solidFill>
+            <a:prstDash val="solid"/>
+          </a:ln>
+        </p:spPr>
+      </p:sp>
+      <p:sp>
+        <p:nvSpPr>
+          <p:cNvPr id="38" name="Text 36"/>
+          <p:cNvSpPr/>
+          <p:nvPr/>
+        </p:nvSpPr>
+        <p:spPr>
+          <a:xfrm>
+            <a:off x="4850892" y="4169664"/>
+            <a:ext cx="685800" cy="475488"/>
           </a:xfrm>
           <a:prstGeom prst="rect">
             <a:avLst/>
@@ -21918,30 +21651,57 @@
               <a:buNone/>
             </a:pPr>
             <a:r>
-              <a:rPr lang="en-US" sz="1400" b="1" dirty="0">
-                <a:solidFill>
-                  <a:srgbClr val="0D9488"/>
+              <a:rPr lang="en-US" sz="900" b="1" dirty="0">
+                <a:solidFill>
+                  <a:srgbClr val="9D174D"/>
                 </a:solidFill>
                 <a:latin typeface="Trebuchet MS" pitchFamily="34" charset="0"/>
                 <a:ea typeface="Trebuchet MS" pitchFamily="34" charset="-122"/>
                 <a:cs typeface="Trebuchet MS" pitchFamily="34" charset="-120"/>
               </a:rPr>
-              <a:t>ver</a:t>
-            </a:r>
-            <a:endParaRPr lang="en-US" sz="1400" dirty="0"/>
-          </a:p>
-        </p:txBody>
-      </p:sp>
-      <p:sp>
-        <p:nvSpPr>
-          <p:cNvPr id="34" name="Text 32"/>
-          <p:cNvSpPr/>
-          <p:nvPr/>
-        </p:nvSpPr>
-        <p:spPr>
-          <a:xfrm>
-            <a:off x="6016752" y="3364992"/>
-            <a:ext cx="411480" cy="475488"/>
+              <a:t>v</a:t>
+            </a:r>
+            <a:endParaRPr lang="en-US" sz="900" dirty="0"/>
+          </a:p>
+        </p:txBody>
+      </p:sp>
+      <p:sp>
+        <p:nvSpPr>
+          <p:cNvPr id="39" name="Shape 37"/>
+          <p:cNvSpPr/>
+          <p:nvPr/>
+        </p:nvSpPr>
+        <p:spPr>
+          <a:xfrm>
+            <a:off x="6062472" y="4169664"/>
+            <a:ext cx="685800" cy="475488"/>
+          </a:xfrm>
+          <a:prstGeom prst="rect">
+            <a:avLst>
+              <a:gd name="adj" fmla="val 7692"/>
+            </a:avLst>
+          </a:prstGeom>
+          <a:solidFill>
+            <a:srgbClr val="FFFFFF"/>
+          </a:solidFill>
+          <a:ln w="12700">
+            <a:solidFill>
+              <a:srgbClr val="DB2777"/>
+            </a:solidFill>
+            <a:prstDash val="solid"/>
+          </a:ln>
+        </p:spPr>
+      </p:sp>
+      <p:sp>
+        <p:nvSpPr>
+          <p:cNvPr id="40" name="Text 38"/>
+          <p:cNvSpPr/>
+          <p:nvPr/>
+        </p:nvSpPr>
+        <p:spPr>
+          <a:xfrm>
+            <a:off x="6062472" y="4169664"/>
+            <a:ext cx="685800" cy="475488"/>
           </a:xfrm>
           <a:prstGeom prst="rect">
             <a:avLst/>
@@ -21957,34 +21717,34 @@
               <a:buNone/>
             </a:pPr>
             <a:r>
-              <a:rPr lang="en-US" sz="1600" b="1" dirty="0">
-                <a:solidFill>
-                  <a:srgbClr val="0D9488"/>
+              <a:rPr lang="en-US" sz="900" b="1" dirty="0">
+                <a:solidFill>
+                  <a:srgbClr val="9D174D"/>
                 </a:solidFill>
                 <a:latin typeface="Trebuchet MS" pitchFamily="34" charset="0"/>
                 <a:ea typeface="Trebuchet MS" pitchFamily="34" charset="-122"/>
                 <a:cs typeface="Trebuchet MS" pitchFamily="34" charset="-120"/>
               </a:rPr>
-              <a:t>·</a:t>
-            </a:r>
-            <a:endParaRPr lang="en-US" sz="1600" dirty="0"/>
-          </a:p>
-        </p:txBody>
-      </p:sp>
-      <p:sp>
-        <p:nvSpPr>
-          <p:cNvPr id="35" name="Shape 33"/>
-          <p:cNvSpPr/>
-          <p:nvPr/>
-        </p:nvSpPr>
-        <p:spPr>
-          <a:xfrm>
-            <a:off x="6428232" y="3364992"/>
-            <a:ext cx="1645920" cy="475488"/>
+              <a:t>er</a:t>
+            </a:r>
+            <a:endParaRPr lang="en-US" sz="900" dirty="0"/>
+          </a:p>
+        </p:txBody>
+      </p:sp>
+      <p:sp>
+        <p:nvSpPr>
+          <p:cNvPr id="41" name="Shape 39"/>
+          <p:cNvSpPr/>
+          <p:nvPr/>
+        </p:nvSpPr>
+        <p:spPr>
+          <a:xfrm>
+            <a:off x="7274052" y="4169664"/>
+            <a:ext cx="685800" cy="475488"/>
           </a:xfrm>
           <a:prstGeom prst="rect">
             <a:avLst>
-              <a:gd name="adj" fmla="val 9615"/>
+              <a:gd name="adj" fmla="val 7692"/>
             </a:avLst>
           </a:prstGeom>
           <a:solidFill>
@@ -21992,22 +21752,22 @@
           </a:solidFill>
           <a:ln w="12700">
             <a:solidFill>
-              <a:srgbClr val="0D9488"/>
-            </a:solidFill>
-            <a:prstDash val="solid"/>
-          </a:ln>
-        </p:spPr>
-      </p:sp>
-      <p:sp>
-        <p:nvSpPr>
-          <p:cNvPr id="36" name="Text 34"/>
-          <p:cNvSpPr/>
-          <p:nvPr/>
-        </p:nvSpPr>
-        <p:spPr>
-          <a:xfrm>
-            <a:off x="6428232" y="3364992"/>
-            <a:ext cx="1645920" cy="475488"/>
+              <a:srgbClr val="DB2777"/>
+            </a:solidFill>
+            <a:prstDash val="solid"/>
+          </a:ln>
+        </p:spPr>
+      </p:sp>
+      <p:sp>
+        <p:nvSpPr>
+          <p:cNvPr id="42" name="Text 40"/>
+          <p:cNvSpPr/>
+          <p:nvPr/>
+        </p:nvSpPr>
+        <p:spPr>
+          <a:xfrm>
+            <a:off x="7274052" y="4169664"/>
+            <a:ext cx="685800" cy="475488"/>
           </a:xfrm>
           <a:prstGeom prst="rect">
             <a:avLst/>
@@ -22023,609 +21783,15 @@
               <a:buNone/>
             </a:pPr>
             <a:r>
-              <a:rPr lang="en-US" sz="1400" b="1" dirty="0">
-                <a:solidFill>
-                  <a:srgbClr val="0D9488"/>
+              <a:rPr lang="en-US" sz="900" b="1" dirty="0">
+                <a:solidFill>
+                  <a:srgbClr val="9D174D"/>
                 </a:solidFill>
                 <a:latin typeface="Trebuchet MS" pitchFamily="34" charset="0"/>
                 <a:ea typeface="Trebuchet MS" pitchFamily="34" charset="-122"/>
                 <a:cs typeface="Trebuchet MS" pitchFamily="34" charset="-120"/>
               </a:rPr>
-              <a:t>sion</a:t>
-            </a:r>
-            <a:endParaRPr lang="en-US" sz="1400" dirty="0"/>
-          </a:p>
-        </p:txBody>
-      </p:sp>
-      <p:sp>
-        <p:nvSpPr>
-          <p:cNvPr id="37" name="Shape 35"/>
-          <p:cNvSpPr/>
-          <p:nvPr/>
-        </p:nvSpPr>
-        <p:spPr>
-          <a:xfrm>
-            <a:off x="365760" y="4096512"/>
-            <a:ext cx="1371600" cy="804672"/>
-          </a:xfrm>
-          <a:prstGeom prst="rect">
-            <a:avLst>
-              <a:gd name="adj" fmla="val 6818"/>
-            </a:avLst>
-          </a:prstGeom>
-          <a:solidFill>
-            <a:srgbClr val="E2E8F0"/>
-          </a:solidFill>
-          <a:ln w="12700">
-            <a:solidFill>
-              <a:srgbClr val="E2E8F0"/>
-            </a:solidFill>
-            <a:prstDash val="solid"/>
-          </a:ln>
-        </p:spPr>
-      </p:sp>
-      <p:sp>
-        <p:nvSpPr>
-          <p:cNvPr id="38" name="Text 36"/>
-          <p:cNvSpPr/>
-          <p:nvPr/>
-        </p:nvSpPr>
-        <p:spPr>
-          <a:xfrm>
-            <a:off x="365760" y="4096512"/>
-            <a:ext cx="1371600" cy="804672"/>
-          </a:xfrm>
-          <a:prstGeom prst="rect">
-            <a:avLst/>
-          </a:prstGeom>
-          <a:noFill/>
-          <a:ln/>
-        </p:spPr>
-        <p:txBody>
-          <a:bodyPr wrap="square" lIns="0" tIns="0" rIns="0" bIns="0" rtlCol="0" anchor="ctr"/>
-          <a:lstStyle/>
-          <a:p>
-            <a:pPr algn="ctr" indent="0" marL="0">
-              <a:buNone/>
-            </a:pPr>
-            <a:r>
-              <a:rPr lang="en-US" sz="1100" b="1" dirty="0">
-                <a:solidFill>
-                  <a:srgbClr val="475569"/>
-                </a:solidFill>
-                <a:latin typeface="Trebuchet MS" pitchFamily="34" charset="0"/>
-                <a:ea typeface="Trebuchet MS" pitchFamily="34" charset="-122"/>
-                <a:cs typeface="Trebuchet MS" pitchFamily="34" charset="-120"/>
-              </a:rPr>
-              <a:t>Phonemes</a:t>
-            </a:r>
-            <a:endParaRPr lang="en-US" sz="1100" dirty="0"/>
-          </a:p>
-        </p:txBody>
-      </p:sp>
-      <p:sp>
-        <p:nvSpPr>
-          <p:cNvPr id="39" name="Shape 37"/>
-          <p:cNvSpPr/>
-          <p:nvPr/>
-        </p:nvSpPr>
-        <p:spPr>
-          <a:xfrm>
-            <a:off x="1874520" y="4096512"/>
-            <a:ext cx="6903720" cy="804672"/>
-          </a:xfrm>
-          <a:prstGeom prst="rect">
-            <a:avLst>
-              <a:gd name="adj" fmla="val 6818"/>
-            </a:avLst>
-          </a:prstGeom>
-          <a:solidFill>
-            <a:srgbClr val="FCE7F3"/>
-          </a:solidFill>
-          <a:ln w="12700">
-            <a:solidFill>
-              <a:srgbClr val="DB2777"/>
-            </a:solidFill>
-            <a:prstDash val="solid"/>
-          </a:ln>
-        </p:spPr>
-      </p:sp>
-      <p:sp>
-        <p:nvSpPr>
-          <p:cNvPr id="40" name="Shape 38"/>
-          <p:cNvSpPr/>
-          <p:nvPr/>
-        </p:nvSpPr>
-        <p:spPr>
-          <a:xfrm>
-            <a:off x="2124837" y="4169664"/>
-            <a:ext cx="685800" cy="384048"/>
-          </a:xfrm>
-          <a:prstGeom prst="rect">
-            <a:avLst>
-              <a:gd name="adj" fmla="val 9524"/>
-            </a:avLst>
-          </a:prstGeom>
-          <a:solidFill>
-            <a:srgbClr val="FFFFFF"/>
-          </a:solidFill>
-          <a:ln w="12700">
-            <a:solidFill>
-              <a:srgbClr val="DB2777"/>
-            </a:solidFill>
-            <a:prstDash val="solid"/>
-          </a:ln>
-        </p:spPr>
-      </p:sp>
-      <p:sp>
-        <p:nvSpPr>
-          <p:cNvPr id="41" name="Text 39"/>
-          <p:cNvSpPr/>
-          <p:nvPr/>
-        </p:nvSpPr>
-        <p:spPr>
-          <a:xfrm>
-            <a:off x="2124837" y="4169664"/>
-            <a:ext cx="685800" cy="384048"/>
-          </a:xfrm>
-          <a:prstGeom prst="rect">
-            <a:avLst/>
-          </a:prstGeom>
-          <a:noFill/>
-          <a:ln/>
-        </p:spPr>
-        <p:txBody>
-          <a:bodyPr wrap="square" lIns="0" tIns="0" rIns="0" bIns="0" rtlCol="0" anchor="ctr"/>
-          <a:lstStyle/>
-          <a:p>
-            <a:pPr algn="ctr" indent="0" marL="0">
-              <a:buNone/>
-            </a:pPr>
-            <a:r>
-              <a:rPr lang="en-US" sz="900" b="1" dirty="0">
-                <a:solidFill>
-                  <a:srgbClr val="9D174D"/>
-                </a:solidFill>
-                <a:latin typeface="Trebuchet MS" pitchFamily="34" charset="0"/>
-                <a:ea typeface="Trebuchet MS" pitchFamily="34" charset="-122"/>
-                <a:cs typeface="Trebuchet MS" pitchFamily="34" charset="-120"/>
-              </a:rPr>
-              <a:t>i</a:t>
-            </a:r>
-            <a:endParaRPr lang="en-US" sz="900" dirty="0"/>
-          </a:p>
-        </p:txBody>
-      </p:sp>
-      <p:sp>
-        <p:nvSpPr>
-          <p:cNvPr id="42" name="Shape 40"/>
-          <p:cNvSpPr/>
-          <p:nvPr/>
-        </p:nvSpPr>
-        <p:spPr>
-          <a:xfrm>
-            <a:off x="3033522" y="4169664"/>
-            <a:ext cx="685800" cy="384048"/>
-          </a:xfrm>
-          <a:prstGeom prst="rect">
-            <a:avLst>
-              <a:gd name="adj" fmla="val 9524"/>
-            </a:avLst>
-          </a:prstGeom>
-          <a:solidFill>
-            <a:srgbClr val="FFFFFF"/>
-          </a:solidFill>
-          <a:ln w="12700">
-            <a:solidFill>
-              <a:srgbClr val="DB2777"/>
-            </a:solidFill>
-            <a:prstDash val="solid"/>
-          </a:ln>
-        </p:spPr>
-      </p:sp>
-      <p:sp>
-        <p:nvSpPr>
-          <p:cNvPr id="43" name="Text 41"/>
-          <p:cNvSpPr/>
-          <p:nvPr/>
-        </p:nvSpPr>
-        <p:spPr>
-          <a:xfrm>
-            <a:off x="3033522" y="4169664"/>
-            <a:ext cx="685800" cy="384048"/>
-          </a:xfrm>
-          <a:prstGeom prst="rect">
-            <a:avLst/>
-          </a:prstGeom>
-          <a:noFill/>
-          <a:ln/>
-        </p:spPr>
-        <p:txBody>
-          <a:bodyPr wrap="square" lIns="0" tIns="0" rIns="0" bIns="0" rtlCol="0" anchor="ctr"/>
-          <a:lstStyle/>
-          <a:p>
-            <a:pPr algn="ctr" indent="0" marL="0">
-              <a:buNone/>
-            </a:pPr>
-            <a:r>
-              <a:rPr lang="en-US" sz="900" b="1" dirty="0">
-                <a:solidFill>
-                  <a:srgbClr val="9D174D"/>
-                </a:solidFill>
-                <a:latin typeface="Trebuchet MS" pitchFamily="34" charset="0"/>
-                <a:ea typeface="Trebuchet MS" pitchFamily="34" charset="-122"/>
-                <a:cs typeface="Trebuchet MS" pitchFamily="34" charset="-120"/>
-              </a:rPr>
-              <a:t>n</a:t>
-            </a:r>
-            <a:endParaRPr lang="en-US" sz="900" dirty="0"/>
-          </a:p>
-        </p:txBody>
-      </p:sp>
-      <p:sp>
-        <p:nvSpPr>
-          <p:cNvPr id="44" name="Shape 42"/>
-          <p:cNvSpPr/>
-          <p:nvPr/>
-        </p:nvSpPr>
-        <p:spPr>
-          <a:xfrm>
-            <a:off x="3942207" y="4169664"/>
-            <a:ext cx="685800" cy="384048"/>
-          </a:xfrm>
-          <a:prstGeom prst="rect">
-            <a:avLst>
-              <a:gd name="adj" fmla="val 9524"/>
-            </a:avLst>
-          </a:prstGeom>
-          <a:solidFill>
-            <a:srgbClr val="FFFFFF"/>
-          </a:solidFill>
-          <a:ln w="12700">
-            <a:solidFill>
-              <a:srgbClr val="DB2777"/>
-            </a:solidFill>
-            <a:prstDash val="solid"/>
-          </a:ln>
-        </p:spPr>
-      </p:sp>
-      <p:sp>
-        <p:nvSpPr>
-          <p:cNvPr id="45" name="Text 43"/>
-          <p:cNvSpPr/>
-          <p:nvPr/>
-        </p:nvSpPr>
-        <p:spPr>
-          <a:xfrm>
-            <a:off x="3942207" y="4169664"/>
-            <a:ext cx="685800" cy="384048"/>
-          </a:xfrm>
-          <a:prstGeom prst="rect">
-            <a:avLst/>
-          </a:prstGeom>
-          <a:noFill/>
-          <a:ln/>
-        </p:spPr>
-        <p:txBody>
-          <a:bodyPr wrap="square" lIns="0" tIns="0" rIns="0" bIns="0" rtlCol="0" anchor="ctr"/>
-          <a:lstStyle/>
-          <a:p>
-            <a:pPr algn="ctr" indent="0" marL="0">
-              <a:buNone/>
-            </a:pPr>
-            <a:r>
-              <a:rPr lang="en-US" sz="900" b="1" dirty="0">
-                <a:solidFill>
-                  <a:srgbClr val="9D174D"/>
-                </a:solidFill>
-                <a:latin typeface="Trebuchet MS" pitchFamily="34" charset="0"/>
-                <a:ea typeface="Trebuchet MS" pitchFamily="34" charset="-122"/>
-                <a:cs typeface="Trebuchet MS" pitchFamily="34" charset="-120"/>
-              </a:rPr>
-              <a:t>v</a:t>
-            </a:r>
-            <a:endParaRPr lang="en-US" sz="900" dirty="0"/>
-          </a:p>
-        </p:txBody>
-      </p:sp>
-      <p:sp>
-        <p:nvSpPr>
-          <p:cNvPr id="46" name="Shape 44"/>
-          <p:cNvSpPr/>
-          <p:nvPr/>
-        </p:nvSpPr>
-        <p:spPr>
-          <a:xfrm>
-            <a:off x="4850892" y="4169664"/>
-            <a:ext cx="685800" cy="384048"/>
-          </a:xfrm>
-          <a:prstGeom prst="rect">
-            <a:avLst>
-              <a:gd name="adj" fmla="val 9524"/>
-            </a:avLst>
-          </a:prstGeom>
-          <a:solidFill>
-            <a:srgbClr val="FFFFFF"/>
-          </a:solidFill>
-          <a:ln w="12700">
-            <a:solidFill>
-              <a:srgbClr val="DB2777"/>
-            </a:solidFill>
-            <a:prstDash val="solid"/>
-          </a:ln>
-        </p:spPr>
-      </p:sp>
-      <p:sp>
-        <p:nvSpPr>
-          <p:cNvPr id="47" name="Text 45"/>
-          <p:cNvSpPr/>
-          <p:nvPr/>
-        </p:nvSpPr>
-        <p:spPr>
-          <a:xfrm>
-            <a:off x="4850892" y="4169664"/>
-            <a:ext cx="685800" cy="384048"/>
-          </a:xfrm>
-          <a:prstGeom prst="rect">
-            <a:avLst/>
-          </a:prstGeom>
-          <a:noFill/>
-          <a:ln/>
-        </p:spPr>
-        <p:txBody>
-          <a:bodyPr wrap="square" lIns="0" tIns="0" rIns="0" bIns="0" rtlCol="0" anchor="ctr"/>
-          <a:lstStyle/>
-          <a:p>
-            <a:pPr algn="ctr" indent="0" marL="0">
-              <a:buNone/>
-            </a:pPr>
-            <a:r>
-              <a:rPr lang="en-US" sz="900" b="1" dirty="0">
-                <a:solidFill>
-                  <a:srgbClr val="9D174D"/>
-                </a:solidFill>
-                <a:latin typeface="Trebuchet MS" pitchFamily="34" charset="0"/>
-                <a:ea typeface="Trebuchet MS" pitchFamily="34" charset="-122"/>
-                <a:cs typeface="Trebuchet MS" pitchFamily="34" charset="-120"/>
-              </a:rPr>
-              <a:t>er</a:t>
-            </a:r>
-            <a:endParaRPr lang="en-US" sz="900" dirty="0"/>
-          </a:p>
-        </p:txBody>
-      </p:sp>
-      <p:sp>
-        <p:nvSpPr>
-          <p:cNvPr id="48" name="Shape 46"/>
-          <p:cNvSpPr/>
-          <p:nvPr/>
-        </p:nvSpPr>
-        <p:spPr>
-          <a:xfrm>
-            <a:off x="5759577" y="4169664"/>
-            <a:ext cx="685800" cy="384048"/>
-          </a:xfrm>
-          <a:prstGeom prst="rect">
-            <a:avLst>
-              <a:gd name="adj" fmla="val 9524"/>
-            </a:avLst>
-          </a:prstGeom>
-          <a:solidFill>
-            <a:srgbClr val="FFFFFF"/>
-          </a:solidFill>
-          <a:ln w="12700">
-            <a:solidFill>
-              <a:srgbClr val="DB2777"/>
-            </a:solidFill>
-            <a:prstDash val="solid"/>
-          </a:ln>
-        </p:spPr>
-      </p:sp>
-      <p:sp>
-        <p:nvSpPr>
-          <p:cNvPr id="49" name="Text 47"/>
-          <p:cNvSpPr/>
-          <p:nvPr/>
-        </p:nvSpPr>
-        <p:spPr>
-          <a:xfrm>
-            <a:off x="5759577" y="4169664"/>
-            <a:ext cx="685800" cy="384048"/>
-          </a:xfrm>
-          <a:prstGeom prst="rect">
-            <a:avLst/>
-          </a:prstGeom>
-          <a:noFill/>
-          <a:ln/>
-        </p:spPr>
-        <p:txBody>
-          <a:bodyPr wrap="square" lIns="0" tIns="0" rIns="0" bIns="0" rtlCol="0" anchor="ctr"/>
-          <a:lstStyle/>
-          <a:p>
-            <a:pPr algn="ctr" indent="0" marL="0">
-              <a:buNone/>
-            </a:pPr>
-            <a:r>
-              <a:rPr lang="en-US" sz="900" b="1" dirty="0">
-                <a:solidFill>
-                  <a:srgbClr val="9D174D"/>
-                </a:solidFill>
-                <a:latin typeface="Trebuchet MS" pitchFamily="34" charset="0"/>
-                <a:ea typeface="Trebuchet MS" pitchFamily="34" charset="-122"/>
-                <a:cs typeface="Trebuchet MS" pitchFamily="34" charset="-120"/>
-              </a:rPr>
-              <a:t>s</a:t>
-            </a:r>
-            <a:endParaRPr lang="en-US" sz="900" dirty="0"/>
-          </a:p>
-        </p:txBody>
-      </p:sp>
-      <p:sp>
-        <p:nvSpPr>
-          <p:cNvPr id="50" name="Text 48"/>
-          <p:cNvSpPr/>
-          <p:nvPr/>
-        </p:nvSpPr>
-        <p:spPr>
-          <a:xfrm>
-            <a:off x="5759577" y="4572000"/>
-            <a:ext cx="685800" cy="219456"/>
-          </a:xfrm>
-          <a:prstGeom prst="rect">
-            <a:avLst/>
-          </a:prstGeom>
-          <a:noFill/>
-          <a:ln/>
-        </p:spPr>
-        <p:txBody>
-          <a:bodyPr wrap="square" lIns="0" tIns="0" rIns="0" bIns="0" rtlCol="0" anchor="t"/>
-          <a:lstStyle/>
-          <a:p>
-            <a:pPr algn="ctr" indent="0" marL="0">
-              <a:buNone/>
-            </a:pPr>
-            <a:r>
-              <a:rPr lang="en-US" sz="750" i="1" dirty="0">
-                <a:solidFill>
-                  <a:srgbClr val="94A3B8"/>
-                </a:solidFill>
-                <a:latin typeface="Calibri" pitchFamily="34" charset="0"/>
-                <a:ea typeface="Calibri" pitchFamily="34" charset="-122"/>
-                <a:cs typeface="Calibri" pitchFamily="34" charset="-120"/>
-              </a:rPr>
-              <a:t>/sh/</a:t>
-            </a:r>
-            <a:endParaRPr lang="en-US" sz="750" dirty="0"/>
-          </a:p>
-        </p:txBody>
-      </p:sp>
-      <p:sp>
-        <p:nvSpPr>
-          <p:cNvPr id="51" name="Shape 49"/>
-          <p:cNvSpPr/>
-          <p:nvPr/>
-        </p:nvSpPr>
-        <p:spPr>
-          <a:xfrm>
-            <a:off x="6668262" y="4169664"/>
-            <a:ext cx="685800" cy="384048"/>
-          </a:xfrm>
-          <a:prstGeom prst="rect">
-            <a:avLst>
-              <a:gd name="adj" fmla="val 9524"/>
-            </a:avLst>
-          </a:prstGeom>
-          <a:solidFill>
-            <a:srgbClr val="FFFFFF"/>
-          </a:solidFill>
-          <a:ln w="12700">
-            <a:solidFill>
-              <a:srgbClr val="DB2777"/>
-            </a:solidFill>
-            <a:prstDash val="solid"/>
-          </a:ln>
-        </p:spPr>
-      </p:sp>
-      <p:sp>
-        <p:nvSpPr>
-          <p:cNvPr id="52" name="Text 50"/>
-          <p:cNvSpPr/>
-          <p:nvPr/>
-        </p:nvSpPr>
-        <p:spPr>
-          <a:xfrm>
-            <a:off x="6668262" y="4169664"/>
-            <a:ext cx="685800" cy="384048"/>
-          </a:xfrm>
-          <a:prstGeom prst="rect">
-            <a:avLst/>
-          </a:prstGeom>
-          <a:noFill/>
-          <a:ln/>
-        </p:spPr>
-        <p:txBody>
-          <a:bodyPr wrap="square" lIns="0" tIns="0" rIns="0" bIns="0" rtlCol="0" anchor="ctr"/>
-          <a:lstStyle/>
-          <a:p>
-            <a:pPr algn="ctr" indent="0" marL="0">
-              <a:buNone/>
-            </a:pPr>
-            <a:r>
-              <a:rPr lang="en-US" sz="900" b="1" dirty="0">
-                <a:solidFill>
-                  <a:srgbClr val="9D174D"/>
-                </a:solidFill>
-                <a:latin typeface="Trebuchet MS" pitchFamily="34" charset="0"/>
-                <a:ea typeface="Trebuchet MS" pitchFamily="34" charset="-122"/>
-                <a:cs typeface="Trebuchet MS" pitchFamily="34" charset="-120"/>
-              </a:rPr>
-              <a:t>io</a:t>
-            </a:r>
-            <a:endParaRPr lang="en-US" sz="900" dirty="0"/>
-          </a:p>
-        </p:txBody>
-      </p:sp>
-      <p:sp>
-        <p:nvSpPr>
-          <p:cNvPr id="53" name="Shape 51"/>
-          <p:cNvSpPr/>
-          <p:nvPr/>
-        </p:nvSpPr>
-        <p:spPr>
-          <a:xfrm>
-            <a:off x="7576947" y="4169664"/>
-            <a:ext cx="685800" cy="384048"/>
-          </a:xfrm>
-          <a:prstGeom prst="rect">
-            <a:avLst>
-              <a:gd name="adj" fmla="val 9524"/>
-            </a:avLst>
-          </a:prstGeom>
-          <a:solidFill>
-            <a:srgbClr val="FFFFFF"/>
-          </a:solidFill>
-          <a:ln w="12700">
-            <a:solidFill>
-              <a:srgbClr val="DB2777"/>
-            </a:solidFill>
-            <a:prstDash val="solid"/>
-          </a:ln>
-        </p:spPr>
-      </p:sp>
-      <p:sp>
-        <p:nvSpPr>
-          <p:cNvPr id="54" name="Text 52"/>
-          <p:cNvSpPr/>
-          <p:nvPr/>
-        </p:nvSpPr>
-        <p:spPr>
-          <a:xfrm>
-            <a:off x="7576947" y="4169664"/>
-            <a:ext cx="685800" cy="384048"/>
-          </a:xfrm>
-          <a:prstGeom prst="rect">
-            <a:avLst/>
-          </a:prstGeom>
-          <a:noFill/>
-          <a:ln/>
-        </p:spPr>
-        <p:txBody>
-          <a:bodyPr wrap="square" lIns="0" tIns="0" rIns="0" bIns="0" rtlCol="0" anchor="ctr"/>
-          <a:lstStyle/>
-          <a:p>
-            <a:pPr algn="ctr" indent="0" marL="0">
-              <a:buNone/>
-            </a:pPr>
-            <a:r>
-              <a:rPr lang="en-US" sz="900" b="1" dirty="0">
-                <a:solidFill>
-                  <a:srgbClr val="9D174D"/>
-                </a:solidFill>
-                <a:latin typeface="Trebuchet MS" pitchFamily="34" charset="0"/>
-                <a:ea typeface="Trebuchet MS" pitchFamily="34" charset="-122"/>
-                <a:cs typeface="Trebuchet MS" pitchFamily="34" charset="-120"/>
-              </a:rPr>
-              <a:t>n</a:t>
+              <a:t>t</a:t>
             </a:r>
             <a:endParaRPr lang="en-US" sz="900" dirty="0"/>
           </a:p>
@@ -23056,7 +22222,7 @@
                 <a:ea typeface="Trebuchet MS" pitchFamily="34" charset="-122"/>
                 <a:cs typeface="Trebuchet MS" pitchFamily="34" charset="-120"/>
               </a:rPr>
-              <a:t>divert</a:t>
+              <a:t>subvert</a:t>
             </a:r>
             <a:endParaRPr lang="en-US" sz="2800" dirty="0"/>
           </a:p>
@@ -23883,7 +23049,7 @@
                 <a:ea typeface="Trebuchet MS" pitchFamily="34" charset="-122"/>
                 <a:cs typeface="Trebuchet MS" pitchFamily="34" charset="-120"/>
               </a:rPr>
-              <a:t>divert</a:t>
+              <a:t>subvert</a:t>
             </a:r>
             <a:endParaRPr lang="en-US" sz="2800" dirty="0"/>
           </a:p>
@@ -24022,7 +23188,7 @@
                 <a:ea typeface="Trebuchet MS" pitchFamily="34" charset="-122"/>
                 <a:cs typeface="Trebuchet MS" pitchFamily="34" charset="-120"/>
               </a:rPr>
-              <a:t>di</a:t>
+              <a:t>sub</a:t>
             </a:r>
             <a:endParaRPr lang="en-US" sz="1300" dirty="0"/>
           </a:p>
@@ -24061,7 +23227,7 @@
                 <a:ea typeface="Calibri" pitchFamily="34" charset="-122"/>
                 <a:cs typeface="Calibri" pitchFamily="34" charset="-120"/>
               </a:rPr>
-              <a:t>apart, away</a:t>
+              <a:t>under, below</a:t>
             </a:r>
             <a:endParaRPr lang="en-US" sz="850" dirty="0"/>
           </a:p>
@@ -25587,7 +24753,7 @@
                 <a:ea typeface="Trebuchet MS" pitchFamily="34" charset="-122"/>
                 <a:cs typeface="Trebuchet MS" pitchFamily="34" charset="-120"/>
               </a:rPr>
-              <a:t>divert</a:t>
+              <a:t>subvert</a:t>
             </a:r>
             <a:endParaRPr lang="en-US" sz="2800" dirty="0"/>
           </a:p>
@@ -25726,7 +24892,7 @@
                 <a:ea typeface="Trebuchet MS" pitchFamily="34" charset="-122"/>
                 <a:cs typeface="Trebuchet MS" pitchFamily="34" charset="-120"/>
               </a:rPr>
-              <a:t>di</a:t>
+              <a:t>sub</a:t>
             </a:r>
             <a:endParaRPr lang="en-US" sz="1300" dirty="0"/>
           </a:p>
@@ -25765,7 +24931,7 @@
                 <a:ea typeface="Calibri" pitchFamily="34" charset="-122"/>
                 <a:cs typeface="Calibri" pitchFamily="34" charset="-120"/>
               </a:rPr>
-              <a:t>apart, away</a:t>
+              <a:t>under, below</a:t>
             </a:r>
             <a:endParaRPr lang="en-US" sz="850" dirty="0"/>
           </a:p>
@@ -26036,7 +25202,7 @@
                 <a:ea typeface="Trebuchet MS" pitchFamily="34" charset="-122"/>
                 <a:cs typeface="Trebuchet MS" pitchFamily="34" charset="-120"/>
               </a:rPr>
-              <a:t>di</a:t>
+              <a:t>sub</a:t>
             </a:r>
             <a:endParaRPr lang="en-US" sz="1400" dirty="0"/>
           </a:p>
@@ -26704,7 +25870,7 @@
                 <a:ea typeface="Trebuchet MS" pitchFamily="34" charset="-122"/>
                 <a:cs typeface="Trebuchet MS" pitchFamily="34" charset="-120"/>
               </a:rPr>
-              <a:t>divert</a:t>
+              <a:t>subvert</a:t>
             </a:r>
             <a:endParaRPr lang="en-US" sz="2800" dirty="0"/>
           </a:p>
@@ -26843,7 +26009,7 @@
                 <a:ea typeface="Trebuchet MS" pitchFamily="34" charset="-122"/>
                 <a:cs typeface="Trebuchet MS" pitchFamily="34" charset="-120"/>
               </a:rPr>
-              <a:t>di</a:t>
+              <a:t>sub</a:t>
             </a:r>
             <a:endParaRPr lang="en-US" sz="1300" dirty="0"/>
           </a:p>
@@ -26882,7 +26048,7 @@
                 <a:ea typeface="Calibri" pitchFamily="34" charset="-122"/>
                 <a:cs typeface="Calibri" pitchFamily="34" charset="-120"/>
               </a:rPr>
-              <a:t>apart, away</a:t>
+              <a:t>under, below</a:t>
             </a:r>
             <a:endParaRPr lang="en-US" sz="850" dirty="0"/>
           </a:p>
@@ -27153,7 +26319,7 @@
                 <a:ea typeface="Trebuchet MS" pitchFamily="34" charset="-122"/>
                 <a:cs typeface="Trebuchet MS" pitchFamily="34" charset="-120"/>
               </a:rPr>
-              <a:t>di</a:t>
+              <a:t>sub</a:t>
             </a:r>
             <a:endParaRPr lang="en-US" sz="1400" dirty="0"/>
           </a:p>
@@ -27365,7 +26531,7 @@
         </p:nvSpPr>
         <p:spPr>
           <a:xfrm>
-            <a:off x="2427732" y="4169664"/>
+            <a:off x="2254649" y="4169664"/>
             <a:ext cx="685800" cy="475488"/>
           </a:xfrm>
           <a:prstGeom prst="rect">
@@ -27392,7 +26558,7 @@
         </p:nvSpPr>
         <p:spPr>
           <a:xfrm>
-            <a:off x="2427732" y="4169664"/>
+            <a:off x="2254649" y="4169664"/>
             <a:ext cx="685800" cy="475488"/>
           </a:xfrm>
           <a:prstGeom prst="rect">
@@ -27417,7 +26583,7 @@
                 <a:ea typeface="Trebuchet MS" pitchFamily="34" charset="-122"/>
                 <a:cs typeface="Trebuchet MS" pitchFamily="34" charset="-120"/>
               </a:rPr>
-              <a:t>d</a:t>
+              <a:t>s</a:t>
             </a:r>
             <a:endParaRPr lang="en-US" sz="900" dirty="0"/>
           </a:p>
@@ -27431,7 +26597,7 @@
         </p:nvSpPr>
         <p:spPr>
           <a:xfrm>
-            <a:off x="3639312" y="4169664"/>
+            <a:off x="3293146" y="4169664"/>
             <a:ext cx="685800" cy="475488"/>
           </a:xfrm>
           <a:prstGeom prst="rect">
@@ -27458,7 +26624,7 @@
         </p:nvSpPr>
         <p:spPr>
           <a:xfrm>
-            <a:off x="3639312" y="4169664"/>
+            <a:off x="3293146" y="4169664"/>
             <a:ext cx="685800" cy="475488"/>
           </a:xfrm>
           <a:prstGeom prst="rect">
@@ -27483,7 +26649,7 @@
                 <a:ea typeface="Trebuchet MS" pitchFamily="34" charset="-122"/>
                 <a:cs typeface="Trebuchet MS" pitchFamily="34" charset="-120"/>
               </a:rPr>
-              <a:t>i</a:t>
+              <a:t>u</a:t>
             </a:r>
             <a:endParaRPr lang="en-US" sz="900" dirty="0"/>
           </a:p>
@@ -27497,7 +26663,7 @@
         </p:nvSpPr>
         <p:spPr>
           <a:xfrm>
-            <a:off x="4850892" y="4169664"/>
+            <a:off x="4331643" y="4169664"/>
             <a:ext cx="685800" cy="475488"/>
           </a:xfrm>
           <a:prstGeom prst="rect">
@@ -27524,7 +26690,7 @@
         </p:nvSpPr>
         <p:spPr>
           <a:xfrm>
-            <a:off x="4850892" y="4169664"/>
+            <a:off x="4331643" y="4169664"/>
             <a:ext cx="685800" cy="475488"/>
           </a:xfrm>
           <a:prstGeom prst="rect">
@@ -27549,7 +26715,7 @@
                 <a:ea typeface="Trebuchet MS" pitchFamily="34" charset="-122"/>
                 <a:cs typeface="Trebuchet MS" pitchFamily="34" charset="-120"/>
               </a:rPr>
-              <a:t>v</a:t>
+              <a:t>b</a:t>
             </a:r>
             <a:endParaRPr lang="en-US" sz="900" dirty="0"/>
           </a:p>
@@ -27563,7 +26729,7 @@
         </p:nvSpPr>
         <p:spPr>
           <a:xfrm>
-            <a:off x="6062472" y="4169664"/>
+            <a:off x="5370141" y="4169664"/>
             <a:ext cx="685800" cy="475488"/>
           </a:xfrm>
           <a:prstGeom prst="rect">
@@ -27590,7 +26756,7 @@
         </p:nvSpPr>
         <p:spPr>
           <a:xfrm>
-            <a:off x="6062472" y="4169664"/>
+            <a:off x="5370141" y="4169664"/>
             <a:ext cx="685800" cy="475488"/>
           </a:xfrm>
           <a:prstGeom prst="rect">
@@ -27615,7 +26781,7 @@
                 <a:ea typeface="Trebuchet MS" pitchFamily="34" charset="-122"/>
                 <a:cs typeface="Trebuchet MS" pitchFamily="34" charset="-120"/>
               </a:rPr>
-              <a:t>er</a:t>
+              <a:t>v</a:t>
             </a:r>
             <a:endParaRPr lang="en-US" sz="900" dirty="0"/>
           </a:p>
@@ -27629,7 +26795,7 @@
         </p:nvSpPr>
         <p:spPr>
           <a:xfrm>
-            <a:off x="7274052" y="4169664"/>
+            <a:off x="6408638" y="4169664"/>
             <a:ext cx="685800" cy="475488"/>
           </a:xfrm>
           <a:prstGeom prst="rect">
@@ -27656,7 +26822,73 @@
         </p:nvSpPr>
         <p:spPr>
           <a:xfrm>
-            <a:off x="7274052" y="4169664"/>
+            <a:off x="6408638" y="4169664"/>
+            <a:ext cx="685800" cy="475488"/>
+          </a:xfrm>
+          <a:prstGeom prst="rect">
+            <a:avLst/>
+          </a:prstGeom>
+          <a:noFill/>
+          <a:ln/>
+        </p:spPr>
+        <p:txBody>
+          <a:bodyPr wrap="square" lIns="0" tIns="0" rIns="0" bIns="0" rtlCol="0" anchor="ctr"/>
+          <a:lstStyle/>
+          <a:p>
+            <a:pPr algn="ctr" indent="0" marL="0">
+              <a:buNone/>
+            </a:pPr>
+            <a:r>
+              <a:rPr lang="en-US" sz="900" b="1" dirty="0">
+                <a:solidFill>
+                  <a:srgbClr val="9D174D"/>
+                </a:solidFill>
+                <a:latin typeface="Trebuchet MS" pitchFamily="34" charset="0"/>
+                <a:ea typeface="Trebuchet MS" pitchFamily="34" charset="-122"/>
+                <a:cs typeface="Trebuchet MS" pitchFamily="34" charset="-120"/>
+              </a:rPr>
+              <a:t>er</a:t>
+            </a:r>
+            <a:endParaRPr lang="en-US" sz="900" dirty="0"/>
+          </a:p>
+        </p:txBody>
+      </p:sp>
+      <p:sp>
+        <p:nvSpPr>
+          <p:cNvPr id="43" name="Shape 41"/>
+          <p:cNvSpPr/>
+          <p:nvPr/>
+        </p:nvSpPr>
+        <p:spPr>
+          <a:xfrm>
+            <a:off x="7447135" y="4169664"/>
+            <a:ext cx="685800" cy="475488"/>
+          </a:xfrm>
+          <a:prstGeom prst="rect">
+            <a:avLst>
+              <a:gd name="adj" fmla="val 7692"/>
+            </a:avLst>
+          </a:prstGeom>
+          <a:solidFill>
+            <a:srgbClr val="FFFFFF"/>
+          </a:solidFill>
+          <a:ln w="12700">
+            <a:solidFill>
+              <a:srgbClr val="DB2777"/>
+            </a:solidFill>
+            <a:prstDash val="solid"/>
+          </a:ln>
+        </p:spPr>
+      </p:sp>
+      <p:sp>
+        <p:nvSpPr>
+          <p:cNvPr id="44" name="Text 42"/>
+          <p:cNvSpPr/>
+          <p:nvPr/>
+        </p:nvSpPr>
+        <p:spPr>
+          <a:xfrm>
+            <a:off x="7447135" y="4169664"/>
             <a:ext cx="685800" cy="475488"/>
           </a:xfrm>
           <a:prstGeom prst="rect">
@@ -28112,7 +27344,7 @@
                 <a:ea typeface="Trebuchet MS" pitchFamily="34" charset="-122"/>
                 <a:cs typeface="Trebuchet MS" pitchFamily="34" charset="-120"/>
               </a:rPr>
-              <a:t>convert</a:t>
+              <a:t>revert</a:t>
             </a:r>
             <a:endParaRPr lang="en-US" sz="2800" dirty="0"/>
           </a:p>
@@ -28939,7 +28171,7 @@
                 <a:ea typeface="Trebuchet MS" pitchFamily="34" charset="-122"/>
                 <a:cs typeface="Trebuchet MS" pitchFamily="34" charset="-120"/>
               </a:rPr>
-              <a:t>convert</a:t>
+              <a:t>revert</a:t>
             </a:r>
             <a:endParaRPr lang="en-US" sz="2800" dirty="0"/>
           </a:p>
@@ -29078,7 +28310,7 @@
                 <a:ea typeface="Trebuchet MS" pitchFamily="34" charset="-122"/>
                 <a:cs typeface="Trebuchet MS" pitchFamily="34" charset="-120"/>
               </a:rPr>
-              <a:t>con</a:t>
+              <a:t>re</a:t>
             </a:r>
             <a:endParaRPr lang="en-US" sz="1300" dirty="0"/>
           </a:p>
@@ -29117,7 +28349,7 @@
                 <a:ea typeface="Calibri" pitchFamily="34" charset="-122"/>
                 <a:cs typeface="Calibri" pitchFamily="34" charset="-120"/>
               </a:rPr>
-              <a:t>together, completely</a:t>
+              <a:t>back, again</a:t>
             </a:r>
             <a:endParaRPr lang="en-US" sz="850" dirty="0"/>
           </a:p>
@@ -29924,7 +29156,7 @@
                 <a:ea typeface="Trebuchet MS" pitchFamily="34" charset="-122"/>
                 <a:cs typeface="Trebuchet MS" pitchFamily="34" charset="-120"/>
               </a:rPr>
-              <a:t>convert</a:t>
+              <a:t>revert</a:t>
             </a:r>
             <a:endParaRPr lang="en-US" sz="2800" dirty="0"/>
           </a:p>
@@ -30063,7 +29295,7 @@
                 <a:ea typeface="Trebuchet MS" pitchFamily="34" charset="-122"/>
                 <a:cs typeface="Trebuchet MS" pitchFamily="34" charset="-120"/>
               </a:rPr>
-              <a:t>con</a:t>
+              <a:t>re</a:t>
             </a:r>
             <a:endParaRPr lang="en-US" sz="1300" dirty="0"/>
           </a:p>
@@ -30102,7 +29334,7 @@
                 <a:ea typeface="Calibri" pitchFamily="34" charset="-122"/>
                 <a:cs typeface="Calibri" pitchFamily="34" charset="-120"/>
               </a:rPr>
-              <a:t>together, completely</a:t>
+              <a:t>back, again</a:t>
             </a:r>
             <a:endParaRPr lang="en-US" sz="850" dirty="0"/>
           </a:p>
@@ -30373,7 +29605,7 @@
                 <a:ea typeface="Trebuchet MS" pitchFamily="34" charset="-122"/>
                 <a:cs typeface="Trebuchet MS" pitchFamily="34" charset="-120"/>
               </a:rPr>
-              <a:t>con</a:t>
+              <a:t>re</a:t>
             </a:r>
             <a:endParaRPr lang="en-US" sz="1400" dirty="0"/>
           </a:p>
@@ -31041,7 +30273,7 @@
                 <a:ea typeface="Trebuchet MS" pitchFamily="34" charset="-122"/>
                 <a:cs typeface="Trebuchet MS" pitchFamily="34" charset="-120"/>
               </a:rPr>
-              <a:t>convert</a:t>
+              <a:t>revert</a:t>
             </a:r>
             <a:endParaRPr lang="en-US" sz="2800" dirty="0"/>
           </a:p>
@@ -31180,7 +30412,7 @@
                 <a:ea typeface="Trebuchet MS" pitchFamily="34" charset="-122"/>
                 <a:cs typeface="Trebuchet MS" pitchFamily="34" charset="-120"/>
               </a:rPr>
-              <a:t>con</a:t>
+              <a:t>re</a:t>
             </a:r>
             <a:endParaRPr lang="en-US" sz="1300" dirty="0"/>
           </a:p>
@@ -31219,7 +30451,7 @@
                 <a:ea typeface="Calibri" pitchFamily="34" charset="-122"/>
                 <a:cs typeface="Calibri" pitchFamily="34" charset="-120"/>
               </a:rPr>
-              <a:t>together, completely</a:t>
+              <a:t>back, again</a:t>
             </a:r>
             <a:endParaRPr lang="en-US" sz="850" dirty="0"/>
           </a:p>
@@ -31490,7 +30722,7 @@
                 <a:ea typeface="Trebuchet MS" pitchFamily="34" charset="-122"/>
                 <a:cs typeface="Trebuchet MS" pitchFamily="34" charset="-120"/>
               </a:rPr>
-              <a:t>con</a:t>
+              <a:t>re</a:t>
             </a:r>
             <a:endParaRPr lang="en-US" sz="1400" dirty="0"/>
           </a:p>
@@ -31676,11 +30908,11 @@
         <p:spPr>
           <a:xfrm>
             <a:off x="1874520" y="4096512"/>
-            <a:ext cx="6903720" cy="804672"/>
+            <a:ext cx="6903720" cy="658368"/>
           </a:xfrm>
           <a:prstGeom prst="rect">
             <a:avLst>
-              <a:gd name="adj" fmla="val 6818"/>
+              <a:gd name="adj" fmla="val 8333"/>
             </a:avLst>
           </a:prstGeom>
           <a:solidFill>
@@ -31702,12 +30934,12 @@
         </p:nvSpPr>
         <p:spPr>
           <a:xfrm>
-            <a:off x="2254649" y="4169664"/>
-            <a:ext cx="685800" cy="384048"/>
+            <a:off x="2427732" y="4169664"/>
+            <a:ext cx="685800" cy="475488"/>
           </a:xfrm>
           <a:prstGeom prst="rect">
             <a:avLst>
-              <a:gd name="adj" fmla="val 9524"/>
+              <a:gd name="adj" fmla="val 7692"/>
             </a:avLst>
           </a:prstGeom>
           <a:solidFill>
@@ -31729,8 +30961,8 @@
         </p:nvSpPr>
         <p:spPr>
           <a:xfrm>
-            <a:off x="2254649" y="4169664"/>
-            <a:ext cx="685800" cy="384048"/>
+            <a:off x="2427732" y="4169664"/>
+            <a:ext cx="685800" cy="475488"/>
           </a:xfrm>
           <a:prstGeom prst="rect">
             <a:avLst/>
@@ -31754,7 +30986,7 @@
                 <a:ea typeface="Trebuchet MS" pitchFamily="34" charset="-122"/>
                 <a:cs typeface="Trebuchet MS" pitchFamily="34" charset="-120"/>
               </a:rPr>
-              <a:t>c</a:t>
+              <a:t>r</a:t>
             </a:r>
             <a:endParaRPr lang="en-US" sz="900" dirty="0"/>
           </a:p>
@@ -31762,57 +30994,18 @@
       </p:sp>
       <p:sp>
         <p:nvSpPr>
-          <p:cNvPr id="35" name="Text 33"/>
-          <p:cNvSpPr/>
-          <p:nvPr/>
-        </p:nvSpPr>
-        <p:spPr>
-          <a:xfrm>
-            <a:off x="2254649" y="4572000"/>
-            <a:ext cx="685800" cy="219456"/>
-          </a:xfrm>
-          <a:prstGeom prst="rect">
-            <a:avLst/>
-          </a:prstGeom>
-          <a:noFill/>
-          <a:ln/>
-        </p:spPr>
-        <p:txBody>
-          <a:bodyPr wrap="square" lIns="0" tIns="0" rIns="0" bIns="0" rtlCol="0" anchor="t"/>
-          <a:lstStyle/>
-          <a:p>
-            <a:pPr algn="ctr" indent="0" marL="0">
-              <a:buNone/>
-            </a:pPr>
-            <a:r>
-              <a:rPr lang="en-US" sz="750" i="1" dirty="0">
-                <a:solidFill>
-                  <a:srgbClr val="94A3B8"/>
-                </a:solidFill>
-                <a:latin typeface="Calibri" pitchFamily="34" charset="0"/>
-                <a:ea typeface="Calibri" pitchFamily="34" charset="-122"/>
-                <a:cs typeface="Calibri" pitchFamily="34" charset="-120"/>
-              </a:rPr>
-              <a:t>/k/</a:t>
-            </a:r>
-            <a:endParaRPr lang="en-US" sz="750" dirty="0"/>
-          </a:p>
-        </p:txBody>
-      </p:sp>
-      <p:sp>
-        <p:nvSpPr>
-          <p:cNvPr id="36" name="Shape 34"/>
-          <p:cNvSpPr/>
-          <p:nvPr/>
-        </p:nvSpPr>
-        <p:spPr>
-          <a:xfrm>
-            <a:off x="3293146" y="4169664"/>
-            <a:ext cx="685800" cy="384048"/>
+          <p:cNvPr id="35" name="Shape 33"/>
+          <p:cNvSpPr/>
+          <p:nvPr/>
+        </p:nvSpPr>
+        <p:spPr>
+          <a:xfrm>
+            <a:off x="3639312" y="4169664"/>
+            <a:ext cx="685800" cy="475488"/>
           </a:xfrm>
           <a:prstGeom prst="rect">
             <a:avLst>
-              <a:gd name="adj" fmla="val 9524"/>
+              <a:gd name="adj" fmla="val 7692"/>
             </a:avLst>
           </a:prstGeom>
           <a:solidFill>
@@ -31828,14 +31021,14 @@
       </p:sp>
       <p:sp>
         <p:nvSpPr>
-          <p:cNvPr id="37" name="Text 35"/>
-          <p:cNvSpPr/>
-          <p:nvPr/>
-        </p:nvSpPr>
-        <p:spPr>
-          <a:xfrm>
-            <a:off x="3293146" y="4169664"/>
-            <a:ext cx="685800" cy="384048"/>
+          <p:cNvPr id="36" name="Text 34"/>
+          <p:cNvSpPr/>
+          <p:nvPr/>
+        </p:nvSpPr>
+        <p:spPr>
+          <a:xfrm>
+            <a:off x="3639312" y="4169664"/>
+            <a:ext cx="685800" cy="475488"/>
           </a:xfrm>
           <a:prstGeom prst="rect">
             <a:avLst/>
@@ -31859,7 +31052,7 @@
                 <a:ea typeface="Trebuchet MS" pitchFamily="34" charset="-122"/>
                 <a:cs typeface="Trebuchet MS" pitchFamily="34" charset="-120"/>
               </a:rPr>
-              <a:t>o</a:t>
+              <a:t>e</a:t>
             </a:r>
             <a:endParaRPr lang="en-US" sz="900" dirty="0"/>
           </a:p>
@@ -31867,18 +31060,18 @@
       </p:sp>
       <p:sp>
         <p:nvSpPr>
-          <p:cNvPr id="38" name="Shape 36"/>
-          <p:cNvSpPr/>
-          <p:nvPr/>
-        </p:nvSpPr>
-        <p:spPr>
-          <a:xfrm>
-            <a:off x="4331643" y="4169664"/>
-            <a:ext cx="685800" cy="384048"/>
+          <p:cNvPr id="37" name="Shape 35"/>
+          <p:cNvSpPr/>
+          <p:nvPr/>
+        </p:nvSpPr>
+        <p:spPr>
+          <a:xfrm>
+            <a:off x="4850892" y="4169664"/>
+            <a:ext cx="685800" cy="475488"/>
           </a:xfrm>
           <a:prstGeom prst="rect">
             <a:avLst>
-              <a:gd name="adj" fmla="val 9524"/>
+              <a:gd name="adj" fmla="val 7692"/>
             </a:avLst>
           </a:prstGeom>
           <a:solidFill>
@@ -31894,14 +31087,14 @@
       </p:sp>
       <p:sp>
         <p:nvSpPr>
-          <p:cNvPr id="39" name="Text 37"/>
-          <p:cNvSpPr/>
-          <p:nvPr/>
-        </p:nvSpPr>
-        <p:spPr>
-          <a:xfrm>
-            <a:off x="4331643" y="4169664"/>
-            <a:ext cx="685800" cy="384048"/>
+          <p:cNvPr id="38" name="Text 36"/>
+          <p:cNvSpPr/>
+          <p:nvPr/>
+        </p:nvSpPr>
+        <p:spPr>
+          <a:xfrm>
+            <a:off x="4850892" y="4169664"/>
+            <a:ext cx="685800" cy="475488"/>
           </a:xfrm>
           <a:prstGeom prst="rect">
             <a:avLst/>
@@ -31925,7 +31118,7 @@
                 <a:ea typeface="Trebuchet MS" pitchFamily="34" charset="-122"/>
                 <a:cs typeface="Trebuchet MS" pitchFamily="34" charset="-120"/>
               </a:rPr>
-              <a:t>n</a:t>
+              <a:t>v</a:t>
             </a:r>
             <a:endParaRPr lang="en-US" sz="900" dirty="0"/>
           </a:p>
@@ -31933,18 +31126,18 @@
       </p:sp>
       <p:sp>
         <p:nvSpPr>
-          <p:cNvPr id="40" name="Shape 38"/>
-          <p:cNvSpPr/>
-          <p:nvPr/>
-        </p:nvSpPr>
-        <p:spPr>
-          <a:xfrm>
-            <a:off x="5370141" y="4169664"/>
-            <a:ext cx="685800" cy="384048"/>
+          <p:cNvPr id="39" name="Shape 37"/>
+          <p:cNvSpPr/>
+          <p:nvPr/>
+        </p:nvSpPr>
+        <p:spPr>
+          <a:xfrm>
+            <a:off x="6062472" y="4169664"/>
+            <a:ext cx="685800" cy="475488"/>
           </a:xfrm>
           <a:prstGeom prst="rect">
             <a:avLst>
-              <a:gd name="adj" fmla="val 9524"/>
+              <a:gd name="adj" fmla="val 7692"/>
             </a:avLst>
           </a:prstGeom>
           <a:solidFill>
@@ -31960,14 +31153,14 @@
       </p:sp>
       <p:sp>
         <p:nvSpPr>
-          <p:cNvPr id="41" name="Text 39"/>
-          <p:cNvSpPr/>
-          <p:nvPr/>
-        </p:nvSpPr>
-        <p:spPr>
-          <a:xfrm>
-            <a:off x="5370141" y="4169664"/>
-            <a:ext cx="685800" cy="384048"/>
+          <p:cNvPr id="40" name="Text 38"/>
+          <p:cNvSpPr/>
+          <p:nvPr/>
+        </p:nvSpPr>
+        <p:spPr>
+          <a:xfrm>
+            <a:off x="6062472" y="4169664"/>
+            <a:ext cx="685800" cy="475488"/>
           </a:xfrm>
           <a:prstGeom prst="rect">
             <a:avLst/>
@@ -31991,7 +31184,7 @@
                 <a:ea typeface="Trebuchet MS" pitchFamily="34" charset="-122"/>
                 <a:cs typeface="Trebuchet MS" pitchFamily="34" charset="-120"/>
               </a:rPr>
-              <a:t>v</a:t>
+              <a:t>er</a:t>
             </a:r>
             <a:endParaRPr lang="en-US" sz="900" dirty="0"/>
           </a:p>
@@ -31999,18 +31192,18 @@
       </p:sp>
       <p:sp>
         <p:nvSpPr>
-          <p:cNvPr id="42" name="Shape 40"/>
-          <p:cNvSpPr/>
-          <p:nvPr/>
-        </p:nvSpPr>
-        <p:spPr>
-          <a:xfrm>
-            <a:off x="6408638" y="4169664"/>
-            <a:ext cx="685800" cy="384048"/>
+          <p:cNvPr id="41" name="Shape 39"/>
+          <p:cNvSpPr/>
+          <p:nvPr/>
+        </p:nvSpPr>
+        <p:spPr>
+          <a:xfrm>
+            <a:off x="7274052" y="4169664"/>
+            <a:ext cx="685800" cy="475488"/>
           </a:xfrm>
           <a:prstGeom prst="rect">
             <a:avLst>
-              <a:gd name="adj" fmla="val 9524"/>
+              <a:gd name="adj" fmla="val 7692"/>
             </a:avLst>
           </a:prstGeom>
           <a:solidFill>
@@ -32026,80 +31219,14 @@
       </p:sp>
       <p:sp>
         <p:nvSpPr>
-          <p:cNvPr id="43" name="Text 41"/>
-          <p:cNvSpPr/>
-          <p:nvPr/>
-        </p:nvSpPr>
-        <p:spPr>
-          <a:xfrm>
-            <a:off x="6408638" y="4169664"/>
-            <a:ext cx="685800" cy="384048"/>
-          </a:xfrm>
-          <a:prstGeom prst="rect">
-            <a:avLst/>
-          </a:prstGeom>
-          <a:noFill/>
-          <a:ln/>
-        </p:spPr>
-        <p:txBody>
-          <a:bodyPr wrap="square" lIns="0" tIns="0" rIns="0" bIns="0" rtlCol="0" anchor="ctr"/>
-          <a:lstStyle/>
-          <a:p>
-            <a:pPr algn="ctr" indent="0" marL="0">
-              <a:buNone/>
-            </a:pPr>
-            <a:r>
-              <a:rPr lang="en-US" sz="900" b="1" dirty="0">
-                <a:solidFill>
-                  <a:srgbClr val="9D174D"/>
-                </a:solidFill>
-                <a:latin typeface="Trebuchet MS" pitchFamily="34" charset="0"/>
-                <a:ea typeface="Trebuchet MS" pitchFamily="34" charset="-122"/>
-                <a:cs typeface="Trebuchet MS" pitchFamily="34" charset="-120"/>
-              </a:rPr>
-              <a:t>er</a:t>
-            </a:r>
-            <a:endParaRPr lang="en-US" sz="900" dirty="0"/>
-          </a:p>
-        </p:txBody>
-      </p:sp>
-      <p:sp>
-        <p:nvSpPr>
-          <p:cNvPr id="44" name="Shape 42"/>
-          <p:cNvSpPr/>
-          <p:nvPr/>
-        </p:nvSpPr>
-        <p:spPr>
-          <a:xfrm>
-            <a:off x="7447135" y="4169664"/>
-            <a:ext cx="685800" cy="384048"/>
-          </a:xfrm>
-          <a:prstGeom prst="rect">
-            <a:avLst>
-              <a:gd name="adj" fmla="val 9524"/>
-            </a:avLst>
-          </a:prstGeom>
-          <a:solidFill>
-            <a:srgbClr val="FFFFFF"/>
-          </a:solidFill>
-          <a:ln w="12700">
-            <a:solidFill>
-              <a:srgbClr val="DB2777"/>
-            </a:solidFill>
-            <a:prstDash val="solid"/>
-          </a:ln>
-        </p:spPr>
-      </p:sp>
-      <p:sp>
-        <p:nvSpPr>
-          <p:cNvPr id="45" name="Text 43"/>
-          <p:cNvSpPr/>
-          <p:nvPr/>
-        </p:nvSpPr>
-        <p:spPr>
-          <a:xfrm>
-            <a:off x="7447135" y="4169664"/>
-            <a:ext cx="685800" cy="384048"/>
+          <p:cNvPr id="42" name="Text 40"/>
+          <p:cNvSpPr/>
+          <p:nvPr/>
+        </p:nvSpPr>
+        <p:spPr>
+          <a:xfrm>
+            <a:off x="7274052" y="4169664"/>
+            <a:ext cx="685800" cy="475488"/>
           </a:xfrm>
           <a:prstGeom prst="rect">
             <a:avLst/>
@@ -35060,7 +34187,7 @@
                 <a:ea typeface="Trebuchet MS" pitchFamily="34" charset="-122"/>
                 <a:cs typeface="Trebuchet MS" pitchFamily="34" charset="-120"/>
               </a:rPr>
-              <a:t>diversion</a:t>
+              <a:t>introvert</a:t>
             </a:r>
             <a:endParaRPr lang="en-US" sz="1200" dirty="0"/>
           </a:p>
@@ -35126,7 +34253,7 @@
                 <a:ea typeface="Trebuchet MS" pitchFamily="34" charset="-122"/>
                 <a:cs typeface="Trebuchet MS" pitchFamily="34" charset="-120"/>
               </a:rPr>
-              <a:t>convertible</a:t>
+              <a:t>extrovert</a:t>
             </a:r>
             <a:endParaRPr lang="en-US" sz="1200" dirty="0"/>
           </a:p>
@@ -36519,7 +35646,7 @@
                 <a:ea typeface="Calibri" pitchFamily="34" charset="-122"/>
                 <a:cs typeface="Calibri" pitchFamily="34" charset="-120"/>
               </a:rPr>
-              <a:t>2.  The word 'invert' means to move something forward in a straight line.</a:t>
+              <a:t>2.  The root 'vert' can only be used at the end of a word.</a:t>
             </a:r>
             <a:endParaRPr lang="en-US" sz="1300" dirty="0"/>
           </a:p>
@@ -36658,7 +35785,7 @@
                 <a:ea typeface="Calibri" pitchFamily="34" charset="-122"/>
                 <a:cs typeface="Calibri" pitchFamily="34" charset="-120"/>
               </a:rPr>
-              <a:t>3.  A convertible car has a roof that can be turned back or folded away.</a:t>
+              <a:t>3.  Adding the prefix 'di-' to 'vert' makes the word 'divert', meaning to turn aside.</a:t>
             </a:r>
             <a:endParaRPr lang="en-US" sz="1300" dirty="0"/>
           </a:p>
@@ -36797,7 +35924,7 @@
                 <a:ea typeface="Calibri" pitchFamily="34" charset="-122"/>
                 <a:cs typeface="Calibri" pitchFamily="34" charset="-120"/>
               </a:rPr>
-              <a:t>4.  The prefix 'di' in 'divert' means to turn or send in a different direction.</a:t>
+              <a:t>4.  The word 'invert' means to make something louder.</a:t>
             </a:r>
             <a:endParaRPr lang="en-US" sz="1300" dirty="0"/>
           </a:p>
@@ -36820,11 +35947,11 @@
             </a:avLst>
           </a:prstGeom>
           <a:solidFill>
-            <a:srgbClr val="DCFCE7"/>
-          </a:solidFill>
-          <a:ln w="12700">
-            <a:solidFill>
-              <a:srgbClr val="16A34A"/>
+            <a:srgbClr val="FEE2E2"/>
+          </a:solidFill>
+          <a:ln w="12700">
+            <a:solidFill>
+              <a:srgbClr val="DC2626"/>
             </a:solidFill>
             <a:prstDash val="solid"/>
           </a:ln>
@@ -36857,13 +35984,13 @@
             <a:r>
               <a:rPr lang="en-US" sz="1100" b="1" dirty="0">
                 <a:solidFill>
-                  <a:srgbClr val="16A34A"/>
+                  <a:srgbClr val="DC2626"/>
                 </a:solidFill>
                 <a:latin typeface="Trebuchet MS" pitchFamily="34" charset="0"/>
                 <a:ea typeface="Trebuchet MS" pitchFamily="34" charset="-122"/>
                 <a:cs typeface="Trebuchet MS" pitchFamily="34" charset="-120"/>
               </a:rPr>
-              <a:t>TRUE</a:t>
+              <a:t>FALSE</a:t>
             </a:r>
             <a:endParaRPr lang="en-US" sz="1100" dirty="0"/>
           </a:p>
@@ -36936,7 +36063,7 @@
                 <a:ea typeface="Calibri" pitchFamily="34" charset="-122"/>
                 <a:cs typeface="Calibri" pitchFamily="34" charset="-120"/>
               </a:rPr>
-              <a:t>5.  The root 'vert' comes from a Greek word meaning to spin.</a:t>
+              <a:t>5.  An extrovert turns their energy outward and enjoys being with others.</a:t>
             </a:r>
             <a:endParaRPr lang="en-US" sz="1300" dirty="0"/>
           </a:p>
@@ -36959,11 +36086,11 @@
             </a:avLst>
           </a:prstGeom>
           <a:solidFill>
-            <a:srgbClr val="FEE2E2"/>
-          </a:solidFill>
-          <a:ln w="12700">
-            <a:solidFill>
-              <a:srgbClr val="DC2626"/>
+            <a:srgbClr val="DCFCE7"/>
+          </a:solidFill>
+          <a:ln w="12700">
+            <a:solidFill>
+              <a:srgbClr val="16A34A"/>
             </a:solidFill>
             <a:prstDash val="solid"/>
           </a:ln>
@@ -36996,13 +36123,13 @@
             <a:r>
               <a:rPr lang="en-US" sz="1100" b="1" dirty="0">
                 <a:solidFill>
-                  <a:srgbClr val="DC2626"/>
+                  <a:srgbClr val="16A34A"/>
                 </a:solidFill>
                 <a:latin typeface="Trebuchet MS" pitchFamily="34" charset="0"/>
                 <a:ea typeface="Trebuchet MS" pitchFamily="34" charset="-122"/>
                 <a:cs typeface="Trebuchet MS" pitchFamily="34" charset="-120"/>
               </a:rPr>
-              <a:t>FALSE</a:t>
+              <a:t>TRUE</a:t>
             </a:r>
             <a:endParaRPr lang="en-US" sz="1100" dirty="0"/>
           </a:p>
@@ -37905,7 +37032,7 @@
                 <a:ea typeface="Trebuchet MS" pitchFamily="34" charset="-122"/>
                 <a:cs typeface="Trebuchet MS" pitchFamily="34" charset="-120"/>
               </a:rPr>
-              <a:t>diversion</a:t>
+              <a:t>introvert</a:t>
             </a:r>
             <a:endParaRPr lang="en-US" sz="1300" dirty="0"/>
           </a:p>
@@ -37971,7 +37098,7 @@
                 <a:ea typeface="Trebuchet MS" pitchFamily="34" charset="-122"/>
                 <a:cs typeface="Trebuchet MS" pitchFamily="34" charset="-120"/>
               </a:rPr>
-              <a:t>convertible</a:t>
+              <a:t>extrovert</a:t>
             </a:r>
             <a:endParaRPr lang="en-US" sz="1300" dirty="0"/>
           </a:p>
@@ -40215,7 +39342,7 @@
                 <a:ea typeface="Calibri" pitchFamily="34" charset="-122"/>
                 <a:cs typeface="Calibri" pitchFamily="34" charset="-120"/>
               </a:rPr>
-              <a:t>To turn something upside down or reverse its position.</a:t>
+              <a:t>To turn something upside down or flip it the other way.</a:t>
             </a:r>
             <a:endParaRPr lang="en-US" sz="1200" dirty="0"/>
           </a:p>
@@ -40354,7 +39481,7 @@
                 <a:ea typeface="Calibri" pitchFamily="34" charset="-122"/>
                 <a:cs typeface="Calibri" pitchFamily="34" charset="-120"/>
               </a:rPr>
-              <a:t>To turn people's attention toward a product or service to make them want to buy it.</a:t>
+              <a:t>To turn people's attention toward a product or service to get them interested in buying it.</a:t>
             </a:r>
             <a:endParaRPr lang="en-US" sz="1200" dirty="0"/>
           </a:p>
@@ -40493,7 +39620,7 @@
                 <a:ea typeface="Calibri" pitchFamily="34" charset="-122"/>
                 <a:cs typeface="Calibri" pitchFamily="34" charset="-120"/>
               </a:rPr>
-              <a:t>To change something from one form or use into another, like converting an old garage into a bedroom.</a:t>
+              <a:t>To change something from one form or use into another, like converting a garage into a bedroom.</a:t>
             </a:r>
             <a:endParaRPr lang="en-US" sz="1200" dirty="0"/>
           </a:p>
@@ -40632,7 +39759,7 @@
                 <a:ea typeface="Calibri" pitchFamily="34" charset="-122"/>
                 <a:cs typeface="Calibri" pitchFamily="34" charset="-120"/>
               </a:rPr>
-              <a:t>A car with a roof that can be turned back or folded down.</a:t>
+              <a:t>A person who turns their energy outward and loves being around lots of other people.</a:t>
             </a:r>
             <a:endParaRPr lang="en-US" sz="1200" dirty="0"/>
           </a:p>
@@ -40771,7 +39898,7 @@
                 <a:ea typeface="Calibri" pitchFamily="34" charset="-122"/>
                 <a:cs typeface="Calibri" pitchFamily="34" charset="-120"/>
               </a:rPr>
-              <a:t>Something that turns your attention away, like a detour on a road or a fun activity.</a:t>
+              <a:t>A person who turns their energy inward and prefers quiet time alone rather than big social gatherings.</a:t>
             </a:r>
             <a:endParaRPr lang="en-US" sz="1200" dirty="0"/>
           </a:p>
@@ -40844,7 +39971,7 @@
                 <a:ea typeface="Trebuchet MS" pitchFamily="34" charset="-122"/>
                 <a:cs typeface="Trebuchet MS" pitchFamily="34" charset="-120"/>
               </a:rPr>
-              <a:t>diversion</a:t>
+              <a:t>introvert</a:t>
             </a:r>
             <a:endParaRPr lang="en-US" sz="1200" dirty="0"/>
           </a:p>
@@ -40910,7 +40037,7 @@
                 <a:ea typeface="Calibri" pitchFamily="34" charset="-122"/>
                 <a:cs typeface="Calibri" pitchFamily="34" charset="-120"/>
               </a:rPr>
-              <a:t>To go back to an earlier way of doing something, like reverting to old habits.</a:t>
+              <a:t>To go back to an earlier state or way of doing things.</a:t>
             </a:r>
             <a:endParaRPr lang="en-US" sz="1200" dirty="0"/>
           </a:p>
@@ -40983,7 +40110,7 @@
                 <a:ea typeface="Trebuchet MS" pitchFamily="34" charset="-122"/>
                 <a:cs typeface="Trebuchet MS" pitchFamily="34" charset="-120"/>
               </a:rPr>
-              <a:t>convertible</a:t>
+              <a:t>extrovert</a:t>
             </a:r>
             <a:endParaRPr lang="en-US" sz="1200" dirty="0"/>
           </a:p>
@@ -41049,7 +40176,7 @@
                 <a:ea typeface="Calibri" pitchFamily="34" charset="-122"/>
                 <a:cs typeface="Calibri" pitchFamily="34" charset="-120"/>
               </a:rPr>
-              <a:t>To turn something away from its usual direction, like diverting traffic away from roadworks.</a:t>
+              <a:t>To turn something away from its usual path, like diverting traffic down a different street.</a:t>
             </a:r>
             <a:endParaRPr lang="en-US" sz="1200" dirty="0"/>
           </a:p>
@@ -41544,7 +40671,7 @@
                 <a:ea typeface="Calibri" pitchFamily="34" charset="-122"/>
                 <a:cs typeface="Calibri" pitchFamily="34" charset="-120"/>
               </a:rPr>
-              <a:t>The council decided to divert traffic away from the main road while the bridge was being repaired.</a:t>
+              <a:t>The council decided to divert the river away from the flooded town to keep residents safe.</a:t>
             </a:r>
             <a:endParaRPr lang="en-US" sz="1500" dirty="0"/>
           </a:p>
@@ -41708,7 +40835,7 @@
                 <a:ea typeface="Calibri" pitchFamily="34" charset="-122"/>
                 <a:cs typeface="Calibri" pitchFamily="34" charset="-120"/>
               </a:rPr>
-              <a:t>Scientists worked hard to convert the solar energy into electricity that could power the whole school.</a:t>
+              <a:t>After trying the new method, the class decided to revert to the original way of solving the problem.</a:t>
             </a:r>
             <a:endParaRPr lang="en-US" sz="1500" dirty="0"/>
           </a:p>
@@ -41872,7 +40999,7 @@
                 <a:ea typeface="Calibri" pitchFamily="34" charset="-122"/>
                 <a:cs typeface="Calibri" pitchFamily="34" charset="-120"/>
               </a:rPr>
-              <a:t>The teacher asked us to invert the fraction before we multiplied, which means to flip it upside down.</a:t>
+              <a:t>An introvert might find it tiring to speak in front of a large crowd, preferring smaller groups instead.</a:t>
             </a:r>
             <a:endParaRPr lang="en-US" sz="1500" dirty="0"/>
           </a:p>
